--- a/Fase 2/Evidencias Proyecto/Presentación Proyecto.pptx
+++ b/Fase 2/Evidencias Proyecto/Presentación Proyecto.pptx
@@ -25,16 +25,17 @@
     <p:sldId id="270" r:id="rId19"/>
     <p:sldId id="271" r:id="rId20"/>
     <p:sldId id="272" r:id="rId21"/>
+    <p:sldId id="273" r:id="rId22"/>
   </p:sldIdLst>
   <p:sldSz cy="6858000" cx="12192000"/>
   <p:notesSz cx="6858000" cy="9144000"/>
   <p:embeddedFontLst>
     <p:embeddedFont>
       <p:font typeface="Open Sans"/>
-      <p:regular r:id="rId22"/>
-      <p:bold r:id="rId23"/>
-      <p:italic r:id="rId24"/>
-      <p:boldItalic r:id="rId25"/>
+      <p:regular r:id="rId23"/>
+      <p:bold r:id="rId24"/>
+      <p:italic r:id="rId25"/>
+      <p:boldItalic r:id="rId26"/>
     </p:embeddedFont>
   </p:embeddedFontLst>
   <p:defaultTextStyle>
@@ -268,7 +269,7 @@
   </p:defaultTextStyle>
   <p:extLst>
     <p:ext uri="GoogleSlidesCustomDataVersion2">
-      <go:slidesCustomData xmlns:go="http://customooxmlschemas.google.com/" r:id="rId26" roundtripDataSignature="AMtx7mgJkxJve+n47E9DFPEuWFBqBFH3/w=="/>
+      <go:slidesCustomData xmlns:go="http://customooxmlschemas.google.com/" r:id="rId27" roundtripDataSignature="AMtx7mhINJxbPyyuLqg3HZJP/aoiHVNpzg=="/>
     </p:ext>
   </p:extLst>
 </p:presentation>
@@ -917,7 +918,7 @@
       </p:grpSpPr>
       <p:sp>
         <p:nvSpPr>
-          <p:cNvPr id="183" name="Google Shape;183;p11:notes"/>
+          <p:cNvPr id="183" name="Google Shape;183;g3a5502607a1_1_13:notes"/>
           <p:cNvSpPr txBox="1"/>
           <p:nvPr>
             <p:ph idx="1" type="body"/>
@@ -956,7 +957,7 @@
       </p:sp>
       <p:sp>
         <p:nvSpPr>
-          <p:cNvPr id="184" name="Google Shape;184;p11:notes"/>
+          <p:cNvPr id="184" name="Google Shape;184;g3a5502607a1_1_13:notes"/>
           <p:cNvSpPr/>
           <p:nvPr>
             <p:ph idx="2" type="sldImg"/>
@@ -965,7 +966,7 @@
         <p:spPr>
           <a:xfrm>
             <a:off x="1143225" y="685800"/>
-            <a:ext cx="4572225" cy="3429000"/>
+            <a:ext cx="4572300" cy="3429000"/>
           </a:xfrm>
           <a:custGeom>
             <a:rect b="b" l="l" r="r" t="t"/>
@@ -1016,42 +1017,7 @@
       </p:grpSpPr>
       <p:sp>
         <p:nvSpPr>
-          <p:cNvPr id="192" name="Google Shape;192;g3a5502607a1_0_10:notes"/>
-          <p:cNvSpPr/>
-          <p:nvPr>
-            <p:ph idx="2" type="sldImg"/>
-          </p:nvPr>
-        </p:nvSpPr>
-        <p:spPr>
-          <a:xfrm>
-            <a:off x="1143225" y="685800"/>
-            <a:ext cx="4572300" cy="3429000"/>
-          </a:xfrm>
-          <a:custGeom>
-            <a:rect b="b" l="l" r="r" t="t"/>
-            <a:pathLst>
-              <a:path extrusionOk="0" h="120000" w="120000">
-                <a:moveTo>
-                  <a:pt x="0" y="0"/>
-                </a:moveTo>
-                <a:lnTo>
-                  <a:pt x="120000" y="0"/>
-                </a:lnTo>
-                <a:lnTo>
-                  <a:pt x="120000" y="120000"/>
-                </a:lnTo>
-                <a:lnTo>
-                  <a:pt x="0" y="120000"/>
-                </a:lnTo>
-                <a:close/>
-              </a:path>
-            </a:pathLst>
-          </a:custGeom>
-        </p:spPr>
-      </p:sp>
-      <p:sp>
-        <p:nvSpPr>
-          <p:cNvPr id="193" name="Google Shape;193;g3a5502607a1_0_10:notes"/>
+          <p:cNvPr id="192" name="Google Shape;192;p11:notes"/>
           <p:cNvSpPr txBox="1"/>
           <p:nvPr>
             <p:ph idx="1" type="body"/>
@@ -1088,172 +1054,9 @@
           </a:p>
         </p:txBody>
       </p:sp>
-    </p:spTree>
-  </p:cSld>
-  <p:clrMapOvr>
-    <a:masterClrMapping/>
-  </p:clrMapOvr>
-</p:notes>
-</file>
-
-<file path=ppt/notesSlides/notesSlide13.xml><?xml version="1.0" encoding="utf-8"?>
-<p:notes xmlns:a="http://schemas.openxmlformats.org/drawingml/2006/main" xmlns:r="http://schemas.openxmlformats.org/officeDocument/2006/relationships" xmlns:mc="http://schemas.openxmlformats.org/markup-compatibility/2006" xmlns:mv="urn:schemas-microsoft-com:mac:vml" xmlns:p="http://schemas.openxmlformats.org/presentationml/2006/main" xmlns:c="http://schemas.openxmlformats.org/drawingml/2006/chart" xmlns:dgm="http://schemas.openxmlformats.org/drawingml/2006/diagram" xmlns:o="urn:schemas-microsoft-com:office:office" xmlns:v="urn:schemas-microsoft-com:vml" xmlns:pvml="urn:schemas-microsoft-com:office:powerpoint" xmlns:com="http://schemas.openxmlformats.org/drawingml/2006/compatibility" xmlns:p14="http://schemas.microsoft.com/office/powerpoint/2010/main" xmlns:p15="http://schemas.microsoft.com/office/powerpoint/2012/main" xmlns:ahyp="http://schemas.microsoft.com/office/drawing/2018/hyperlinkcolor" showMasterPhAnim="0" showMasterSp="0">
-  <p:cSld>
-    <p:spTree>
-      <p:nvGrpSpPr>
-        <p:cNvPr id="198" name="Shape 198"/>
-        <p:cNvGrpSpPr/>
-        <p:nvPr/>
-      </p:nvGrpSpPr>
-      <p:grpSpPr>
-        <a:xfrm>
-          <a:off x="0" y="0"/>
-          <a:ext cx="0" cy="0"/>
-          <a:chOff x="0" y="0"/>
-          <a:chExt cx="0" cy="0"/>
-        </a:xfrm>
-      </p:grpSpPr>
       <p:sp>
         <p:nvSpPr>
-          <p:cNvPr id="199" name="Google Shape;199;g3a5502607a1_0_15:notes"/>
-          <p:cNvSpPr/>
-          <p:nvPr>
-            <p:ph idx="2" type="sldImg"/>
-          </p:nvPr>
-        </p:nvSpPr>
-        <p:spPr>
-          <a:xfrm>
-            <a:off x="1143225" y="685800"/>
-            <a:ext cx="4572300" cy="3429000"/>
-          </a:xfrm>
-          <a:custGeom>
-            <a:rect b="b" l="l" r="r" t="t"/>
-            <a:pathLst>
-              <a:path extrusionOk="0" h="120000" w="120000">
-                <a:moveTo>
-                  <a:pt x="0" y="0"/>
-                </a:moveTo>
-                <a:lnTo>
-                  <a:pt x="120000" y="0"/>
-                </a:lnTo>
-                <a:lnTo>
-                  <a:pt x="120000" y="120000"/>
-                </a:lnTo>
-                <a:lnTo>
-                  <a:pt x="0" y="120000"/>
-                </a:lnTo>
-                <a:close/>
-              </a:path>
-            </a:pathLst>
-          </a:custGeom>
-        </p:spPr>
-      </p:sp>
-      <p:sp>
-        <p:nvSpPr>
-          <p:cNvPr id="200" name="Google Shape;200;g3a5502607a1_0_15:notes"/>
-          <p:cNvSpPr txBox="1"/>
-          <p:nvPr>
-            <p:ph idx="1" type="body"/>
-          </p:nvPr>
-        </p:nvSpPr>
-        <p:spPr>
-          <a:xfrm>
-            <a:off x="685800" y="4343400"/>
-            <a:ext cx="5486400" cy="4114800"/>
-          </a:xfrm>
-          <a:prstGeom prst="rect">
-            <a:avLst/>
-          </a:prstGeom>
-        </p:spPr>
-        <p:txBody>
-          <a:bodyPr anchorCtr="0" anchor="t" bIns="91425" lIns="91425" spcFirstLastPara="1" rIns="91425" wrap="square" tIns="91425">
-            <a:noAutofit/>
-          </a:bodyPr>
-          <a:lstStyle/>
-          <a:p>
-            <a:pPr indent="0" lvl="0" marL="0" rtl="0" algn="l">
-              <a:spcBef>
-                <a:spcPts val="0"/>
-              </a:spcBef>
-              <a:spcAft>
-                <a:spcPts val="0"/>
-              </a:spcAft>
-              <a:buNone/>
-            </a:pPr>
-            <a:r>
-              <a:t/>
-            </a:r>
-            <a:endParaRPr/>
-          </a:p>
-        </p:txBody>
-      </p:sp>
-    </p:spTree>
-  </p:cSld>
-  <p:clrMapOvr>
-    <a:masterClrMapping/>
-  </p:clrMapOvr>
-</p:notes>
-</file>
-
-<file path=ppt/notesSlides/notesSlide14.xml><?xml version="1.0" encoding="utf-8"?>
-<p:notes xmlns:a="http://schemas.openxmlformats.org/drawingml/2006/main" xmlns:r="http://schemas.openxmlformats.org/officeDocument/2006/relationships" xmlns:mc="http://schemas.openxmlformats.org/markup-compatibility/2006" xmlns:mv="urn:schemas-microsoft-com:mac:vml" xmlns:p="http://schemas.openxmlformats.org/presentationml/2006/main" xmlns:c="http://schemas.openxmlformats.org/drawingml/2006/chart" xmlns:dgm="http://schemas.openxmlformats.org/drawingml/2006/diagram" xmlns:o="urn:schemas-microsoft-com:office:office" xmlns:v="urn:schemas-microsoft-com:vml" xmlns:pvml="urn:schemas-microsoft-com:office:powerpoint" xmlns:com="http://schemas.openxmlformats.org/drawingml/2006/compatibility" xmlns:p14="http://schemas.microsoft.com/office/powerpoint/2010/main" xmlns:p15="http://schemas.microsoft.com/office/powerpoint/2012/main" xmlns:ahyp="http://schemas.microsoft.com/office/drawing/2018/hyperlinkcolor" showMasterPhAnim="0" showMasterSp="0">
-  <p:cSld>
-    <p:spTree>
-      <p:nvGrpSpPr>
-        <p:cNvPr id="205" name="Shape 205"/>
-        <p:cNvGrpSpPr/>
-        <p:nvPr/>
-      </p:nvGrpSpPr>
-      <p:grpSpPr>
-        <a:xfrm>
-          <a:off x="0" y="0"/>
-          <a:ext cx="0" cy="0"/>
-          <a:chOff x="0" y="0"/>
-          <a:chExt cx="0" cy="0"/>
-        </a:xfrm>
-      </p:grpSpPr>
-      <p:sp>
-        <p:nvSpPr>
-          <p:cNvPr id="206" name="Google Shape;206;p12:notes"/>
-          <p:cNvSpPr txBox="1"/>
-          <p:nvPr>
-            <p:ph idx="1" type="body"/>
-          </p:nvPr>
-        </p:nvSpPr>
-        <p:spPr>
-          <a:xfrm>
-            <a:off x="685800" y="4343400"/>
-            <a:ext cx="5486400" cy="4114800"/>
-          </a:xfrm>
-          <a:prstGeom prst="rect">
-            <a:avLst/>
-          </a:prstGeom>
-        </p:spPr>
-        <p:txBody>
-          <a:bodyPr anchorCtr="0" anchor="t" bIns="91425" lIns="91425" spcFirstLastPara="1" rIns="91425" wrap="square" tIns="91425">
-            <a:noAutofit/>
-          </a:bodyPr>
-          <a:lstStyle/>
-          <a:p>
-            <a:pPr indent="0" lvl="0" marL="0" rtl="0" algn="l">
-              <a:spcBef>
-                <a:spcPts val="0"/>
-              </a:spcBef>
-              <a:spcAft>
-                <a:spcPts val="0"/>
-              </a:spcAft>
-              <a:buNone/>
-            </a:pPr>
-            <a:r>
-              <a:t/>
-            </a:r>
-            <a:endParaRPr/>
-          </a:p>
-        </p:txBody>
-      </p:sp>
-      <p:sp>
-        <p:nvSpPr>
-          <p:cNvPr id="207" name="Google Shape;207;p12:notes"/>
+          <p:cNvPr id="193" name="Google Shape;193;p11:notes"/>
           <p:cNvSpPr/>
           <p:nvPr>
             <p:ph idx="2" type="sldImg"/>
@@ -1294,12 +1097,12 @@
 </p:notes>
 </file>
 
-<file path=ppt/notesSlides/notesSlide15.xml><?xml version="1.0" encoding="utf-8"?>
+<file path=ppt/notesSlides/notesSlide13.xml><?xml version="1.0" encoding="utf-8"?>
 <p:notes xmlns:a="http://schemas.openxmlformats.org/drawingml/2006/main" xmlns:r="http://schemas.openxmlformats.org/officeDocument/2006/relationships" xmlns:mc="http://schemas.openxmlformats.org/markup-compatibility/2006" xmlns:mv="urn:schemas-microsoft-com:mac:vml" xmlns:p="http://schemas.openxmlformats.org/presentationml/2006/main" xmlns:c="http://schemas.openxmlformats.org/drawingml/2006/chart" xmlns:dgm="http://schemas.openxmlformats.org/drawingml/2006/diagram" xmlns:o="urn:schemas-microsoft-com:office:office" xmlns:v="urn:schemas-microsoft-com:vml" xmlns:pvml="urn:schemas-microsoft-com:office:powerpoint" xmlns:com="http://schemas.openxmlformats.org/drawingml/2006/compatibility" xmlns:p14="http://schemas.microsoft.com/office/powerpoint/2010/main" xmlns:p15="http://schemas.microsoft.com/office/powerpoint/2012/main" xmlns:ahyp="http://schemas.microsoft.com/office/drawing/2018/hyperlinkcolor" showMasterPhAnim="0" showMasterSp="0">
   <p:cSld>
     <p:spTree>
       <p:nvGrpSpPr>
-        <p:cNvPr id="219" name="Shape 219"/>
+        <p:cNvPr id="200" name="Shape 200"/>
         <p:cNvGrpSpPr/>
         <p:nvPr/>
       </p:nvGrpSpPr>
@@ -1313,7 +1116,42 @@
       </p:grpSpPr>
       <p:sp>
         <p:nvSpPr>
-          <p:cNvPr id="220" name="Google Shape;220;p13:notes"/>
+          <p:cNvPr id="201" name="Google Shape;201;g3a5502607a1_0_10:notes"/>
+          <p:cNvSpPr/>
+          <p:nvPr>
+            <p:ph idx="2" type="sldImg"/>
+          </p:nvPr>
+        </p:nvSpPr>
+        <p:spPr>
+          <a:xfrm>
+            <a:off x="1143225" y="685800"/>
+            <a:ext cx="4572300" cy="3429000"/>
+          </a:xfrm>
+          <a:custGeom>
+            <a:rect b="b" l="l" r="r" t="t"/>
+            <a:pathLst>
+              <a:path extrusionOk="0" h="120000" w="120000">
+                <a:moveTo>
+                  <a:pt x="0" y="0"/>
+                </a:moveTo>
+                <a:lnTo>
+                  <a:pt x="120000" y="0"/>
+                </a:lnTo>
+                <a:lnTo>
+                  <a:pt x="120000" y="120000"/>
+                </a:lnTo>
+                <a:lnTo>
+                  <a:pt x="0" y="120000"/>
+                </a:lnTo>
+                <a:close/>
+              </a:path>
+            </a:pathLst>
+          </a:custGeom>
+        </p:spPr>
+      </p:sp>
+      <p:sp>
+        <p:nvSpPr>
+          <p:cNvPr id="202" name="Google Shape;202;g3a5502607a1_0_10:notes"/>
           <p:cNvSpPr txBox="1"/>
           <p:nvPr>
             <p:ph idx="1" type="body"/>
@@ -1350,9 +1188,172 @@
           </a:p>
         </p:txBody>
       </p:sp>
+    </p:spTree>
+  </p:cSld>
+  <p:clrMapOvr>
+    <a:masterClrMapping/>
+  </p:clrMapOvr>
+</p:notes>
+</file>
+
+<file path=ppt/notesSlides/notesSlide14.xml><?xml version="1.0" encoding="utf-8"?>
+<p:notes xmlns:a="http://schemas.openxmlformats.org/drawingml/2006/main" xmlns:r="http://schemas.openxmlformats.org/officeDocument/2006/relationships" xmlns:mc="http://schemas.openxmlformats.org/markup-compatibility/2006" xmlns:mv="urn:schemas-microsoft-com:mac:vml" xmlns:p="http://schemas.openxmlformats.org/presentationml/2006/main" xmlns:c="http://schemas.openxmlformats.org/drawingml/2006/chart" xmlns:dgm="http://schemas.openxmlformats.org/drawingml/2006/diagram" xmlns:o="urn:schemas-microsoft-com:office:office" xmlns:v="urn:schemas-microsoft-com:vml" xmlns:pvml="urn:schemas-microsoft-com:office:powerpoint" xmlns:com="http://schemas.openxmlformats.org/drawingml/2006/compatibility" xmlns:p14="http://schemas.microsoft.com/office/powerpoint/2010/main" xmlns:p15="http://schemas.microsoft.com/office/powerpoint/2012/main" xmlns:ahyp="http://schemas.microsoft.com/office/drawing/2018/hyperlinkcolor" showMasterPhAnim="0" showMasterSp="0">
+  <p:cSld>
+    <p:spTree>
+      <p:nvGrpSpPr>
+        <p:cNvPr id="207" name="Shape 207"/>
+        <p:cNvGrpSpPr/>
+        <p:nvPr/>
+      </p:nvGrpSpPr>
+      <p:grpSpPr>
+        <a:xfrm>
+          <a:off x="0" y="0"/>
+          <a:ext cx="0" cy="0"/>
+          <a:chOff x="0" y="0"/>
+          <a:chExt cx="0" cy="0"/>
+        </a:xfrm>
+      </p:grpSpPr>
       <p:sp>
         <p:nvSpPr>
-          <p:cNvPr id="221" name="Google Shape;221;p13:notes"/>
+          <p:cNvPr id="208" name="Google Shape;208;g3a5502607a1_0_15:notes"/>
+          <p:cNvSpPr/>
+          <p:nvPr>
+            <p:ph idx="2" type="sldImg"/>
+          </p:nvPr>
+        </p:nvSpPr>
+        <p:spPr>
+          <a:xfrm>
+            <a:off x="1143225" y="685800"/>
+            <a:ext cx="4572300" cy="3429000"/>
+          </a:xfrm>
+          <a:custGeom>
+            <a:rect b="b" l="l" r="r" t="t"/>
+            <a:pathLst>
+              <a:path extrusionOk="0" h="120000" w="120000">
+                <a:moveTo>
+                  <a:pt x="0" y="0"/>
+                </a:moveTo>
+                <a:lnTo>
+                  <a:pt x="120000" y="0"/>
+                </a:lnTo>
+                <a:lnTo>
+                  <a:pt x="120000" y="120000"/>
+                </a:lnTo>
+                <a:lnTo>
+                  <a:pt x="0" y="120000"/>
+                </a:lnTo>
+                <a:close/>
+              </a:path>
+            </a:pathLst>
+          </a:custGeom>
+        </p:spPr>
+      </p:sp>
+      <p:sp>
+        <p:nvSpPr>
+          <p:cNvPr id="209" name="Google Shape;209;g3a5502607a1_0_15:notes"/>
+          <p:cNvSpPr txBox="1"/>
+          <p:nvPr>
+            <p:ph idx="1" type="body"/>
+          </p:nvPr>
+        </p:nvSpPr>
+        <p:spPr>
+          <a:xfrm>
+            <a:off x="685800" y="4343400"/>
+            <a:ext cx="5486400" cy="4114800"/>
+          </a:xfrm>
+          <a:prstGeom prst="rect">
+            <a:avLst/>
+          </a:prstGeom>
+        </p:spPr>
+        <p:txBody>
+          <a:bodyPr anchorCtr="0" anchor="t" bIns="91425" lIns="91425" spcFirstLastPara="1" rIns="91425" wrap="square" tIns="91425">
+            <a:noAutofit/>
+          </a:bodyPr>
+          <a:lstStyle/>
+          <a:p>
+            <a:pPr indent="0" lvl="0" marL="0" rtl="0" algn="l">
+              <a:spcBef>
+                <a:spcPts val="0"/>
+              </a:spcBef>
+              <a:spcAft>
+                <a:spcPts val="0"/>
+              </a:spcAft>
+              <a:buNone/>
+            </a:pPr>
+            <a:r>
+              <a:t/>
+            </a:r>
+            <a:endParaRPr/>
+          </a:p>
+        </p:txBody>
+      </p:sp>
+    </p:spTree>
+  </p:cSld>
+  <p:clrMapOvr>
+    <a:masterClrMapping/>
+  </p:clrMapOvr>
+</p:notes>
+</file>
+
+<file path=ppt/notesSlides/notesSlide15.xml><?xml version="1.0" encoding="utf-8"?>
+<p:notes xmlns:a="http://schemas.openxmlformats.org/drawingml/2006/main" xmlns:r="http://schemas.openxmlformats.org/officeDocument/2006/relationships" xmlns:mc="http://schemas.openxmlformats.org/markup-compatibility/2006" xmlns:mv="urn:schemas-microsoft-com:mac:vml" xmlns:p="http://schemas.openxmlformats.org/presentationml/2006/main" xmlns:c="http://schemas.openxmlformats.org/drawingml/2006/chart" xmlns:dgm="http://schemas.openxmlformats.org/drawingml/2006/diagram" xmlns:o="urn:schemas-microsoft-com:office:office" xmlns:v="urn:schemas-microsoft-com:vml" xmlns:pvml="urn:schemas-microsoft-com:office:powerpoint" xmlns:com="http://schemas.openxmlformats.org/drawingml/2006/compatibility" xmlns:p14="http://schemas.microsoft.com/office/powerpoint/2010/main" xmlns:p15="http://schemas.microsoft.com/office/powerpoint/2012/main" xmlns:ahyp="http://schemas.microsoft.com/office/drawing/2018/hyperlinkcolor" showMasterPhAnim="0" showMasterSp="0">
+  <p:cSld>
+    <p:spTree>
+      <p:nvGrpSpPr>
+        <p:cNvPr id="214" name="Shape 214"/>
+        <p:cNvGrpSpPr/>
+        <p:nvPr/>
+      </p:nvGrpSpPr>
+      <p:grpSpPr>
+        <a:xfrm>
+          <a:off x="0" y="0"/>
+          <a:ext cx="0" cy="0"/>
+          <a:chOff x="0" y="0"/>
+          <a:chExt cx="0" cy="0"/>
+        </a:xfrm>
+      </p:grpSpPr>
+      <p:sp>
+        <p:nvSpPr>
+          <p:cNvPr id="215" name="Google Shape;215;p12:notes"/>
+          <p:cNvSpPr txBox="1"/>
+          <p:nvPr>
+            <p:ph idx="1" type="body"/>
+          </p:nvPr>
+        </p:nvSpPr>
+        <p:spPr>
+          <a:xfrm>
+            <a:off x="685800" y="4343400"/>
+            <a:ext cx="5486400" cy="4114800"/>
+          </a:xfrm>
+          <a:prstGeom prst="rect">
+            <a:avLst/>
+          </a:prstGeom>
+        </p:spPr>
+        <p:txBody>
+          <a:bodyPr anchorCtr="0" anchor="t" bIns="91425" lIns="91425" spcFirstLastPara="1" rIns="91425" wrap="square" tIns="91425">
+            <a:noAutofit/>
+          </a:bodyPr>
+          <a:lstStyle/>
+          <a:p>
+            <a:pPr indent="0" lvl="0" marL="0" rtl="0" algn="l">
+              <a:spcBef>
+                <a:spcPts val="0"/>
+              </a:spcBef>
+              <a:spcAft>
+                <a:spcPts val="0"/>
+              </a:spcAft>
+              <a:buNone/>
+            </a:pPr>
+            <a:r>
+              <a:t/>
+            </a:r>
+            <a:endParaRPr/>
+          </a:p>
+        </p:txBody>
+      </p:sp>
+      <p:sp>
+        <p:nvSpPr>
+          <p:cNvPr id="216" name="Google Shape;216;p12:notes"/>
           <p:cNvSpPr/>
           <p:nvPr>
             <p:ph idx="2" type="sldImg"/>
@@ -1398,7 +1399,7 @@
   <p:cSld>
     <p:spTree>
       <p:nvGrpSpPr>
-        <p:cNvPr id="227" name="Shape 227"/>
+        <p:cNvPr id="228" name="Shape 228"/>
         <p:cNvGrpSpPr/>
         <p:nvPr/>
       </p:nvGrpSpPr>
@@ -1412,7 +1413,7 @@
       </p:grpSpPr>
       <p:sp>
         <p:nvSpPr>
-          <p:cNvPr id="228" name="Google Shape;228;p14:notes"/>
+          <p:cNvPr id="229" name="Google Shape;229;p13:notes"/>
           <p:cNvSpPr txBox="1"/>
           <p:nvPr>
             <p:ph idx="1" type="body"/>
@@ -1451,7 +1452,7 @@
       </p:sp>
       <p:sp>
         <p:nvSpPr>
-          <p:cNvPr id="229" name="Google Shape;229;p14:notes"/>
+          <p:cNvPr id="230" name="Google Shape;230;p13:notes"/>
           <p:cNvSpPr/>
           <p:nvPr>
             <p:ph idx="2" type="sldImg"/>
@@ -1497,7 +1498,7 @@
   <p:cSld>
     <p:spTree>
       <p:nvGrpSpPr>
-        <p:cNvPr id="235" name="Shape 235"/>
+        <p:cNvPr id="236" name="Shape 236"/>
         <p:cNvGrpSpPr/>
         <p:nvPr/>
       </p:nvGrpSpPr>
@@ -1511,7 +1512,7 @@
       </p:grpSpPr>
       <p:sp>
         <p:nvSpPr>
-          <p:cNvPr id="236" name="Google Shape;236;p16:notes"/>
+          <p:cNvPr id="237" name="Google Shape;237;p14:notes"/>
           <p:cNvSpPr txBox="1"/>
           <p:nvPr>
             <p:ph idx="1" type="body"/>
@@ -1550,7 +1551,106 @@
       </p:sp>
       <p:sp>
         <p:nvSpPr>
-          <p:cNvPr id="237" name="Google Shape;237;p16:notes"/>
+          <p:cNvPr id="238" name="Google Shape;238;p14:notes"/>
+          <p:cNvSpPr/>
+          <p:nvPr>
+            <p:ph idx="2" type="sldImg"/>
+          </p:nvPr>
+        </p:nvSpPr>
+        <p:spPr>
+          <a:xfrm>
+            <a:off x="1143225" y="685800"/>
+            <a:ext cx="4572225" cy="3429000"/>
+          </a:xfrm>
+          <a:custGeom>
+            <a:rect b="b" l="l" r="r" t="t"/>
+            <a:pathLst>
+              <a:path extrusionOk="0" h="120000" w="120000">
+                <a:moveTo>
+                  <a:pt x="0" y="0"/>
+                </a:moveTo>
+                <a:lnTo>
+                  <a:pt x="120000" y="0"/>
+                </a:lnTo>
+                <a:lnTo>
+                  <a:pt x="120000" y="120000"/>
+                </a:lnTo>
+                <a:lnTo>
+                  <a:pt x="0" y="120000"/>
+                </a:lnTo>
+                <a:close/>
+              </a:path>
+            </a:pathLst>
+          </a:custGeom>
+        </p:spPr>
+      </p:sp>
+    </p:spTree>
+  </p:cSld>
+  <p:clrMapOvr>
+    <a:masterClrMapping/>
+  </p:clrMapOvr>
+</p:notes>
+</file>
+
+<file path=ppt/notesSlides/notesSlide18.xml><?xml version="1.0" encoding="utf-8"?>
+<p:notes xmlns:a="http://schemas.openxmlformats.org/drawingml/2006/main" xmlns:r="http://schemas.openxmlformats.org/officeDocument/2006/relationships" xmlns:mc="http://schemas.openxmlformats.org/markup-compatibility/2006" xmlns:mv="urn:schemas-microsoft-com:mac:vml" xmlns:p="http://schemas.openxmlformats.org/presentationml/2006/main" xmlns:c="http://schemas.openxmlformats.org/drawingml/2006/chart" xmlns:dgm="http://schemas.openxmlformats.org/drawingml/2006/diagram" xmlns:o="urn:schemas-microsoft-com:office:office" xmlns:v="urn:schemas-microsoft-com:vml" xmlns:pvml="urn:schemas-microsoft-com:office:powerpoint" xmlns:com="http://schemas.openxmlformats.org/drawingml/2006/compatibility" xmlns:p14="http://schemas.microsoft.com/office/powerpoint/2010/main" xmlns:p15="http://schemas.microsoft.com/office/powerpoint/2012/main" xmlns:ahyp="http://schemas.microsoft.com/office/drawing/2018/hyperlinkcolor" showMasterPhAnim="0" showMasterSp="0">
+  <p:cSld>
+    <p:spTree>
+      <p:nvGrpSpPr>
+        <p:cNvPr id="244" name="Shape 244"/>
+        <p:cNvGrpSpPr/>
+        <p:nvPr/>
+      </p:nvGrpSpPr>
+      <p:grpSpPr>
+        <a:xfrm>
+          <a:off x="0" y="0"/>
+          <a:ext cx="0" cy="0"/>
+          <a:chOff x="0" y="0"/>
+          <a:chExt cx="0" cy="0"/>
+        </a:xfrm>
+      </p:grpSpPr>
+      <p:sp>
+        <p:nvSpPr>
+          <p:cNvPr id="245" name="Google Shape;245;p16:notes"/>
+          <p:cNvSpPr txBox="1"/>
+          <p:nvPr>
+            <p:ph idx="1" type="body"/>
+          </p:nvPr>
+        </p:nvSpPr>
+        <p:spPr>
+          <a:xfrm>
+            <a:off x="685800" y="4343400"/>
+            <a:ext cx="5486400" cy="4114800"/>
+          </a:xfrm>
+          <a:prstGeom prst="rect">
+            <a:avLst/>
+          </a:prstGeom>
+        </p:spPr>
+        <p:txBody>
+          <a:bodyPr anchorCtr="0" anchor="t" bIns="91425" lIns="91425" spcFirstLastPara="1" rIns="91425" wrap="square" tIns="91425">
+            <a:noAutofit/>
+          </a:bodyPr>
+          <a:lstStyle/>
+          <a:p>
+            <a:pPr indent="0" lvl="0" marL="0" rtl="0" algn="l">
+              <a:spcBef>
+                <a:spcPts val="0"/>
+              </a:spcBef>
+              <a:spcAft>
+                <a:spcPts val="0"/>
+              </a:spcAft>
+              <a:buNone/>
+            </a:pPr>
+            <a:r>
+              <a:t/>
+            </a:r>
+            <a:endParaRPr/>
+          </a:p>
+        </p:txBody>
+      </p:sp>
+      <p:sp>
+        <p:nvSpPr>
+          <p:cNvPr id="246" name="Google Shape;246;p16:notes"/>
           <p:cNvSpPr/>
           <p:nvPr>
             <p:ph idx="2" type="sldImg"/>
@@ -12830,7 +12930,7 @@
       </p:grpSpPr>
       <p:pic>
         <p:nvPicPr>
-          <p:cNvPr descr="EscuelaIT Duoc UC - Escuela de Informática y Telecomunicaciones Duoc UC - Duoc  UC | LinkedIn" id="186" name="Google Shape;186;p11"/>
+          <p:cNvPr descr="EscuelaIT Duoc UC - Escuela de Informática y Telecomunicaciones Duoc UC - Duoc  UC | LinkedIn" id="186" name="Google Shape;186;g3a5502607a1_1_13"/>
           <p:cNvPicPr preferRelativeResize="0"/>
           <p:nvPr/>
         </p:nvPicPr>
@@ -12857,7 +12957,213 @@
       </p:pic>
       <p:sp>
         <p:nvSpPr>
-          <p:cNvPr id="187" name="Google Shape;187;p11"/>
+          <p:cNvPr id="187" name="Google Shape;187;g3a5502607a1_1_13"/>
+          <p:cNvSpPr txBox="1"/>
+          <p:nvPr/>
+        </p:nvSpPr>
+        <p:spPr>
+          <a:xfrm>
+            <a:off x="136188" y="368928"/>
+            <a:ext cx="12192000" cy="369300"/>
+          </a:xfrm>
+          <a:prstGeom prst="rect">
+            <a:avLst/>
+          </a:prstGeom>
+          <a:noFill/>
+          <a:ln>
+            <a:noFill/>
+          </a:ln>
+        </p:spPr>
+        <p:txBody>
+          <a:bodyPr anchorCtr="0" anchor="t" bIns="45700" lIns="91425" spcFirstLastPara="1" rIns="91425" wrap="square" tIns="45700">
+            <a:spAutoFit/>
+          </a:bodyPr>
+          <a:lstStyle/>
+          <a:p>
+            <a:pPr indent="0" lvl="0" marL="0" marR="0" rtl="0" algn="l">
+              <a:spcBef>
+                <a:spcPts val="0"/>
+              </a:spcBef>
+              <a:spcAft>
+                <a:spcPts val="0"/>
+              </a:spcAft>
+              <a:buNone/>
+            </a:pPr>
+            <a:r>
+              <a:rPr lang="es-CL" sz="1800">
+                <a:solidFill>
+                  <a:srgbClr val="757070"/>
+                </a:solidFill>
+                <a:latin typeface="Calibri"/>
+                <a:ea typeface="Calibri"/>
+                <a:cs typeface="Calibri"/>
+                <a:sym typeface="Calibri"/>
+              </a:rPr>
+              <a:t>PROYECTO “DATA SCHOOL”</a:t>
+            </a:r>
+            <a:endParaRPr/>
+          </a:p>
+        </p:txBody>
+      </p:sp>
+      <p:sp>
+        <p:nvSpPr>
+          <p:cNvPr id="188" name="Google Shape;188;g3a5502607a1_1_13"/>
+          <p:cNvSpPr txBox="1"/>
+          <p:nvPr/>
+        </p:nvSpPr>
+        <p:spPr>
+          <a:xfrm>
+            <a:off x="0" y="854530"/>
+            <a:ext cx="12192000" cy="646500"/>
+          </a:xfrm>
+          <a:prstGeom prst="rect">
+            <a:avLst/>
+          </a:prstGeom>
+          <a:noFill/>
+          <a:ln>
+            <a:noFill/>
+          </a:ln>
+        </p:spPr>
+        <p:txBody>
+          <a:bodyPr anchorCtr="0" anchor="t" bIns="45700" lIns="91425" spcFirstLastPara="1" rIns="91425" wrap="square" tIns="45700">
+            <a:spAutoFit/>
+          </a:bodyPr>
+          <a:lstStyle/>
+          <a:p>
+            <a:pPr indent="0" lvl="0" marL="0" marR="0" rtl="0" algn="ctr">
+              <a:spcBef>
+                <a:spcPts val="0"/>
+              </a:spcBef>
+              <a:spcAft>
+                <a:spcPts val="0"/>
+              </a:spcAft>
+              <a:buNone/>
+            </a:pPr>
+            <a:r>
+              <a:rPr lang="es-CL" sz="3600">
+                <a:solidFill>
+                  <a:schemeClr val="dk1"/>
+                </a:solidFill>
+                <a:latin typeface="Calibri"/>
+                <a:ea typeface="Calibri"/>
+                <a:cs typeface="Calibri"/>
+                <a:sym typeface="Calibri"/>
+              </a:rPr>
+              <a:t>Modelo de datos - Encuestas</a:t>
+            </a:r>
+            <a:endParaRPr/>
+          </a:p>
+        </p:txBody>
+      </p:sp>
+      <p:cxnSp>
+        <p:nvCxnSpPr>
+          <p:cNvPr id="189" name="Google Shape;189;g3a5502607a1_1_13"/>
+          <p:cNvCxnSpPr/>
+          <p:nvPr/>
+        </p:nvCxnSpPr>
+        <p:spPr>
+          <a:xfrm>
+            <a:off x="0" y="758027"/>
+            <a:ext cx="4085700" cy="0"/>
+          </a:xfrm>
+          <a:prstGeom prst="straightConnector1">
+            <a:avLst/>
+          </a:prstGeom>
+          <a:noFill/>
+          <a:ln cap="flat" cmpd="sng" w="15875">
+            <a:solidFill>
+              <a:srgbClr val="F5F7FC"/>
+            </a:solidFill>
+            <a:prstDash val="solid"/>
+            <a:miter lim="800000"/>
+            <a:headEnd len="sm" w="sm" type="none"/>
+            <a:tailEnd len="sm" w="sm" type="none"/>
+          </a:ln>
+        </p:spPr>
+      </p:cxnSp>
+      <p:pic>
+        <p:nvPicPr>
+          <p:cNvPr id="190" name="Google Shape;190;g3a5502607a1_1_13"/>
+          <p:cNvPicPr preferRelativeResize="0"/>
+          <p:nvPr/>
+        </p:nvPicPr>
+        <p:blipFill>
+          <a:blip r:embed="rId4">
+            <a:alphaModFix/>
+          </a:blip>
+          <a:stretch>
+            <a:fillRect/>
+          </a:stretch>
+        </p:blipFill>
+        <p:spPr>
+          <a:xfrm>
+            <a:off x="2811225" y="1597530"/>
+            <a:ext cx="7096508" cy="5052170"/>
+          </a:xfrm>
+          <a:prstGeom prst="rect">
+            <a:avLst/>
+          </a:prstGeom>
+          <a:noFill/>
+          <a:ln>
+            <a:noFill/>
+          </a:ln>
+        </p:spPr>
+      </p:pic>
+    </p:spTree>
+  </p:cSld>
+  <p:clrMapOvr>
+    <a:masterClrMapping/>
+  </p:clrMapOvr>
+</p:sld>
+</file>
+
+<file path=ppt/slides/slide12.xml><?xml version="1.0" encoding="utf-8"?>
+<p:sld xmlns:a="http://schemas.openxmlformats.org/drawingml/2006/main" xmlns:r="http://schemas.openxmlformats.org/officeDocument/2006/relationships" xmlns:mc="http://schemas.openxmlformats.org/markup-compatibility/2006" xmlns:mv="urn:schemas-microsoft-com:mac:vml" xmlns:p="http://schemas.openxmlformats.org/presentationml/2006/main" xmlns:c="http://schemas.openxmlformats.org/drawingml/2006/chart" xmlns:dgm="http://schemas.openxmlformats.org/drawingml/2006/diagram" xmlns:o="urn:schemas-microsoft-com:office:office" xmlns:v="urn:schemas-microsoft-com:vml" xmlns:pvml="urn:schemas-microsoft-com:office:powerpoint" xmlns:com="http://schemas.openxmlformats.org/drawingml/2006/compatibility" xmlns:p14="http://schemas.microsoft.com/office/powerpoint/2010/main" xmlns:p15="http://schemas.microsoft.com/office/powerpoint/2012/main" xmlns:ahyp="http://schemas.microsoft.com/office/drawing/2018/hyperlinkcolor">
+  <p:cSld>
+    <p:spTree>
+      <p:nvGrpSpPr>
+        <p:cNvPr id="194" name="Shape 194"/>
+        <p:cNvGrpSpPr/>
+        <p:nvPr/>
+      </p:nvGrpSpPr>
+      <p:grpSpPr>
+        <a:xfrm>
+          <a:off x="0" y="0"/>
+          <a:ext cx="0" cy="0"/>
+          <a:chOff x="0" y="0"/>
+          <a:chExt cx="0" cy="0"/>
+        </a:xfrm>
+      </p:grpSpPr>
+      <p:pic>
+        <p:nvPicPr>
+          <p:cNvPr descr="EscuelaIT Duoc UC - Escuela de Informática y Telecomunicaciones Duoc UC - Duoc  UC | LinkedIn" id="195" name="Google Shape;195;p11"/>
+          <p:cNvPicPr preferRelativeResize="0"/>
+          <p:nvPr/>
+        </p:nvPicPr>
+        <p:blipFill rotWithShape="1">
+          <a:blip r:embed="rId3">
+            <a:alphaModFix/>
+          </a:blip>
+          <a:srcRect b="0" l="0" r="0" t="0"/>
+          <a:stretch/>
+        </p:blipFill>
+        <p:spPr>
+          <a:xfrm>
+            <a:off x="8772152" y="207550"/>
+            <a:ext cx="3141406" cy="785352"/>
+          </a:xfrm>
+          <a:prstGeom prst="rect">
+            <a:avLst/>
+          </a:prstGeom>
+          <a:noFill/>
+          <a:ln>
+            <a:noFill/>
+          </a:ln>
+        </p:spPr>
+      </p:pic>
+      <p:sp>
+        <p:nvSpPr>
+          <p:cNvPr id="196" name="Google Shape;196;p11"/>
           <p:cNvSpPr txBox="1"/>
           <p:nvPr/>
         </p:nvSpPr>
@@ -12931,7 +13237,7 @@
       </p:sp>
       <p:sp>
         <p:nvSpPr>
-          <p:cNvPr id="188" name="Google Shape;188;p11"/>
+          <p:cNvPr id="197" name="Google Shape;197;p11"/>
           <p:cNvSpPr txBox="1"/>
           <p:nvPr/>
         </p:nvSpPr>
@@ -12996,7 +13302,7 @@
       </p:sp>
       <p:cxnSp>
         <p:nvCxnSpPr>
-          <p:cNvPr id="189" name="Google Shape;189;p11"/>
+          <p:cNvPr id="198" name="Google Shape;198;p11"/>
           <p:cNvCxnSpPr/>
           <p:nvPr/>
         </p:nvCxnSpPr>
@@ -13022,7 +13328,7 @@
       </p:cxnSp>
       <p:sp>
         <p:nvSpPr>
-          <p:cNvPr id="190" name="Google Shape;190;p11"/>
+          <p:cNvPr id="199" name="Google Shape;199;p11"/>
           <p:cNvSpPr txBox="1"/>
           <p:nvPr/>
         </p:nvSpPr>
@@ -13102,7 +13408,7 @@
                   <a:schemeClr val="dk1"/>
                 </a:solidFill>
               </a:rPr>
-              <a:t>correlación entre las condiciones socioeconómicas familiares de los estudiantes y su rendimiento académico</a:t>
+              <a:t> Correlación entre las condiciones socioeconómicas familiares de los estudiantes y su rendimiento académico</a:t>
             </a:r>
             <a:endParaRPr sz="1700">
               <a:solidFill>
@@ -13405,12 +13711,12 @@
 </p:sld>
 </file>
 
-<file path=ppt/slides/slide12.xml><?xml version="1.0" encoding="utf-8"?>
+<file path=ppt/slides/slide13.xml><?xml version="1.0" encoding="utf-8"?>
 <p:sld xmlns:a="http://schemas.openxmlformats.org/drawingml/2006/main" xmlns:r="http://schemas.openxmlformats.org/officeDocument/2006/relationships" xmlns:mc="http://schemas.openxmlformats.org/markup-compatibility/2006" xmlns:mv="urn:schemas-microsoft-com:mac:vml" xmlns:p="http://schemas.openxmlformats.org/presentationml/2006/main" xmlns:c="http://schemas.openxmlformats.org/drawingml/2006/chart" xmlns:dgm="http://schemas.openxmlformats.org/drawingml/2006/diagram" xmlns:o="urn:schemas-microsoft-com:office:office" xmlns:v="urn:schemas-microsoft-com:vml" xmlns:pvml="urn:schemas-microsoft-com:office:powerpoint" xmlns:com="http://schemas.openxmlformats.org/drawingml/2006/compatibility" xmlns:p14="http://schemas.microsoft.com/office/powerpoint/2010/main" xmlns:p15="http://schemas.microsoft.com/office/powerpoint/2012/main" xmlns:ahyp="http://schemas.microsoft.com/office/drawing/2018/hyperlinkcolor">
   <p:cSld>
     <p:spTree>
       <p:nvGrpSpPr>
-        <p:cNvPr id="194" name="Shape 194"/>
+        <p:cNvPr id="203" name="Shape 203"/>
         <p:cNvGrpSpPr/>
         <p:nvPr/>
       </p:nvGrpSpPr>
@@ -13424,7 +13730,7 @@
       </p:grpSpPr>
       <p:sp>
         <p:nvSpPr>
-          <p:cNvPr id="195" name="Google Shape;195;g3a5502607a1_0_10"/>
+          <p:cNvPr id="204" name="Google Shape;204;g3a5502607a1_0_10"/>
           <p:cNvSpPr txBox="1"/>
           <p:nvPr>
             <p:ph idx="1" type="subTitle"/>
@@ -13498,7 +13804,7 @@
                 <a:cs typeface="Arial"/>
                 <a:sym typeface="Arial"/>
               </a:rPr>
-              <a:t>¿Qué?</a:t>
+              <a:t>¿Qué? </a:t>
             </a:r>
             <a:r>
               <a:rPr lang="es-CL" sz="1700">
@@ -13836,7 +14142,7 @@
       </p:sp>
       <p:sp>
         <p:nvSpPr>
-          <p:cNvPr id="196" name="Google Shape;196;g3a5502607a1_0_10"/>
+          <p:cNvPr id="205" name="Google Shape;205;g3a5502607a1_0_10"/>
           <p:cNvSpPr txBox="1"/>
           <p:nvPr/>
         </p:nvSpPr>
@@ -13886,565 +14192,7 @@
       </p:sp>
       <p:pic>
         <p:nvPicPr>
-          <p:cNvPr descr="EscuelaIT Duoc UC - Escuela de Informática y Telecomunicaciones Duoc UC - Duoc  UC | LinkedIn" id="197" name="Google Shape;197;g3a5502607a1_0_10"/>
-          <p:cNvPicPr preferRelativeResize="0"/>
-          <p:nvPr/>
-        </p:nvPicPr>
-        <p:blipFill rotWithShape="1">
-          <a:blip r:embed="rId3">
-            <a:alphaModFix/>
-          </a:blip>
-          <a:srcRect b="0" l="0" r="0" t="0"/>
-          <a:stretch/>
-        </p:blipFill>
-        <p:spPr>
-          <a:xfrm>
-            <a:off x="8772152" y="207550"/>
-            <a:ext cx="3141406" cy="785352"/>
-          </a:xfrm>
-          <a:prstGeom prst="rect">
-            <a:avLst/>
-          </a:prstGeom>
-          <a:noFill/>
-          <a:ln>
-            <a:noFill/>
-          </a:ln>
-        </p:spPr>
-      </p:pic>
-    </p:spTree>
-  </p:cSld>
-  <p:clrMapOvr>
-    <a:masterClrMapping/>
-  </p:clrMapOvr>
-</p:sld>
-</file>
-
-<file path=ppt/slides/slide13.xml><?xml version="1.0" encoding="utf-8"?>
-<p:sld xmlns:a="http://schemas.openxmlformats.org/drawingml/2006/main" xmlns:r="http://schemas.openxmlformats.org/officeDocument/2006/relationships" xmlns:mc="http://schemas.openxmlformats.org/markup-compatibility/2006" xmlns:mv="urn:schemas-microsoft-com:mac:vml" xmlns:p="http://schemas.openxmlformats.org/presentationml/2006/main" xmlns:c="http://schemas.openxmlformats.org/drawingml/2006/chart" xmlns:dgm="http://schemas.openxmlformats.org/drawingml/2006/diagram" xmlns:o="urn:schemas-microsoft-com:office:office" xmlns:v="urn:schemas-microsoft-com:vml" xmlns:pvml="urn:schemas-microsoft-com:office:powerpoint" xmlns:com="http://schemas.openxmlformats.org/drawingml/2006/compatibility" xmlns:p14="http://schemas.microsoft.com/office/powerpoint/2010/main" xmlns:p15="http://schemas.microsoft.com/office/powerpoint/2012/main" xmlns:ahyp="http://schemas.microsoft.com/office/drawing/2018/hyperlinkcolor">
-  <p:cSld>
-    <p:spTree>
-      <p:nvGrpSpPr>
-        <p:cNvPr id="201" name="Shape 201"/>
-        <p:cNvGrpSpPr/>
-        <p:nvPr/>
-      </p:nvGrpSpPr>
-      <p:grpSpPr>
-        <a:xfrm>
-          <a:off x="0" y="0"/>
-          <a:ext cx="0" cy="0"/>
-          <a:chOff x="0" y="0"/>
-          <a:chExt cx="0" cy="0"/>
-        </a:xfrm>
-      </p:grpSpPr>
-      <p:sp>
-        <p:nvSpPr>
-          <p:cNvPr id="202" name="Google Shape;202;g3a5502607a1_0_15"/>
-          <p:cNvSpPr txBox="1"/>
-          <p:nvPr>
-            <p:ph idx="1" type="subTitle"/>
-          </p:nvPr>
-        </p:nvSpPr>
-        <p:spPr>
-          <a:xfrm>
-            <a:off x="850700" y="1192825"/>
-            <a:ext cx="10633800" cy="5332200"/>
-          </a:xfrm>
-          <a:prstGeom prst="rect">
-            <a:avLst/>
-          </a:prstGeom>
-        </p:spPr>
-        <p:txBody>
-          <a:bodyPr anchorCtr="0" anchor="t" bIns="45700" lIns="91425" spcFirstLastPara="1" rIns="91425" wrap="square" tIns="45700">
-            <a:normAutofit/>
-          </a:bodyPr>
-          <a:lstStyle/>
-          <a:p>
-            <a:pPr indent="0" lvl="0" marL="0" rtl="0" algn="l">
-              <a:lnSpc>
-                <a:spcPct val="100000"/>
-              </a:lnSpc>
-              <a:spcBef>
-                <a:spcPts val="2000"/>
-              </a:spcBef>
-              <a:spcAft>
-                <a:spcPts val="0"/>
-              </a:spcAft>
-              <a:buClr>
-                <a:schemeClr val="dk1"/>
-              </a:buClr>
-              <a:buSzPts val="1100"/>
-              <a:buFont typeface="Arial"/>
-              <a:buNone/>
-            </a:pPr>
-            <a:r>
-              <a:rPr b="1" lang="es-CL" sz="1700">
-                <a:latin typeface="Arial"/>
-                <a:ea typeface="Arial"/>
-                <a:cs typeface="Arial"/>
-                <a:sym typeface="Arial"/>
-              </a:rPr>
-              <a:t>3</a:t>
-            </a:r>
-            <a:r>
-              <a:rPr b="1" lang="es-CL" sz="1700">
-                <a:latin typeface="Arial"/>
-                <a:ea typeface="Arial"/>
-                <a:cs typeface="Arial"/>
-                <a:sym typeface="Arial"/>
-              </a:rPr>
-              <a:t>)Análisis de Asistencia vs Rendimiento </a:t>
-            </a:r>
-            <a:endParaRPr b="1" sz="1700">
-              <a:latin typeface="Arial"/>
-              <a:ea typeface="Arial"/>
-              <a:cs typeface="Arial"/>
-              <a:sym typeface="Arial"/>
-            </a:endParaRPr>
-          </a:p>
-          <a:p>
-            <a:pPr indent="0" lvl="0" marL="0" rtl="0" algn="l">
-              <a:lnSpc>
-                <a:spcPct val="100000"/>
-              </a:lnSpc>
-              <a:spcBef>
-                <a:spcPts val="2000"/>
-              </a:spcBef>
-              <a:spcAft>
-                <a:spcPts val="0"/>
-              </a:spcAft>
-              <a:buClr>
-                <a:schemeClr val="dk1"/>
-              </a:buClr>
-              <a:buSzPts val="1100"/>
-              <a:buFont typeface="Arial"/>
-              <a:buNone/>
-            </a:pPr>
-            <a:r>
-              <a:rPr b="1" lang="es-CL" sz="1700">
-                <a:latin typeface="Arial"/>
-                <a:ea typeface="Arial"/>
-                <a:cs typeface="Arial"/>
-                <a:sym typeface="Arial"/>
-              </a:rPr>
-              <a:t>¿Qué?</a:t>
-            </a:r>
-            <a:r>
-              <a:rPr lang="es-CL" sz="1700">
-                <a:latin typeface="Arial"/>
-                <a:ea typeface="Arial"/>
-                <a:cs typeface="Arial"/>
-                <a:sym typeface="Arial"/>
-              </a:rPr>
-              <a:t>Correlación entre el porcentaje de asistencia a clases y el rendimiento académico de los estudiantes</a:t>
-            </a:r>
-            <a:endParaRPr sz="1700">
-              <a:latin typeface="Arial"/>
-              <a:ea typeface="Arial"/>
-              <a:cs typeface="Arial"/>
-              <a:sym typeface="Arial"/>
-            </a:endParaRPr>
-          </a:p>
-          <a:p>
-            <a:pPr indent="0" lvl="0" marL="0" rtl="0" algn="l">
-              <a:lnSpc>
-                <a:spcPct val="100000"/>
-              </a:lnSpc>
-              <a:spcBef>
-                <a:spcPts val="2000"/>
-              </a:spcBef>
-              <a:spcAft>
-                <a:spcPts val="0"/>
-              </a:spcAft>
-              <a:buClr>
-                <a:schemeClr val="dk1"/>
-              </a:buClr>
-              <a:buSzPts val="1100"/>
-              <a:buFont typeface="Arial"/>
-              <a:buNone/>
-            </a:pPr>
-            <a:r>
-              <a:rPr b="1" lang="es-CL" sz="1700">
-                <a:latin typeface="Arial"/>
-                <a:ea typeface="Arial"/>
-                <a:cs typeface="Arial"/>
-                <a:sym typeface="Arial"/>
-              </a:rPr>
-              <a:t>¿Por qué?: </a:t>
-            </a:r>
-            <a:endParaRPr b="1" sz="1700">
-              <a:latin typeface="Arial"/>
-              <a:ea typeface="Arial"/>
-              <a:cs typeface="Arial"/>
-              <a:sym typeface="Arial"/>
-            </a:endParaRPr>
-          </a:p>
-          <a:p>
-            <a:pPr indent="-336550" lvl="0" marL="457200" rtl="0" algn="l">
-              <a:lnSpc>
-                <a:spcPct val="100000"/>
-              </a:lnSpc>
-              <a:spcBef>
-                <a:spcPts val="2000"/>
-              </a:spcBef>
-              <a:spcAft>
-                <a:spcPts val="0"/>
-              </a:spcAft>
-              <a:buSzPts val="1700"/>
-              <a:buChar char="●"/>
-            </a:pPr>
-            <a:r>
-              <a:rPr lang="es-CL" sz="1700">
-                <a:latin typeface="Arial"/>
-                <a:ea typeface="Arial"/>
-                <a:cs typeface="Arial"/>
-                <a:sym typeface="Arial"/>
-              </a:rPr>
-              <a:t>Identificar el umbral crítico de ausentismo que afecta significativamente las notas</a:t>
-            </a:r>
-            <a:endParaRPr sz="1700">
-              <a:latin typeface="Arial"/>
-              <a:ea typeface="Arial"/>
-              <a:cs typeface="Arial"/>
-              <a:sym typeface="Arial"/>
-            </a:endParaRPr>
-          </a:p>
-          <a:p>
-            <a:pPr indent="-336550" lvl="0" marL="457200" rtl="0" algn="l">
-              <a:lnSpc>
-                <a:spcPct val="100000"/>
-              </a:lnSpc>
-              <a:spcBef>
-                <a:spcPts val="0"/>
-              </a:spcBef>
-              <a:spcAft>
-                <a:spcPts val="0"/>
-              </a:spcAft>
-              <a:buSzPts val="1700"/>
-              <a:buChar char="●"/>
-            </a:pPr>
-            <a:r>
-              <a:rPr lang="es-CL" sz="1700">
-                <a:latin typeface="Arial"/>
-                <a:ea typeface="Arial"/>
-                <a:cs typeface="Arial"/>
-                <a:sym typeface="Arial"/>
-              </a:rPr>
-              <a:t>Detectar estudiantes en riesgo por inasistencias frecuentes</a:t>
-            </a:r>
-            <a:endParaRPr sz="1700">
-              <a:latin typeface="Arial"/>
-              <a:ea typeface="Arial"/>
-              <a:cs typeface="Arial"/>
-              <a:sym typeface="Arial"/>
-            </a:endParaRPr>
-          </a:p>
-          <a:p>
-            <a:pPr indent="-336550" lvl="0" marL="457200" rtl="0" algn="l">
-              <a:lnSpc>
-                <a:spcPct val="100000"/>
-              </a:lnSpc>
-              <a:spcBef>
-                <a:spcPts val="0"/>
-              </a:spcBef>
-              <a:spcAft>
-                <a:spcPts val="0"/>
-              </a:spcAft>
-              <a:buSzPts val="1700"/>
-              <a:buChar char="●"/>
-            </a:pPr>
-            <a:r>
-              <a:rPr lang="es-CL" sz="1700">
-                <a:latin typeface="Arial"/>
-                <a:ea typeface="Arial"/>
-                <a:cs typeface="Arial"/>
-                <a:sym typeface="Arial"/>
-              </a:rPr>
-              <a:t>Justificar políticas de control de asistencia con evidencia</a:t>
-            </a:r>
-            <a:endParaRPr sz="1700">
-              <a:latin typeface="Arial"/>
-              <a:ea typeface="Arial"/>
-              <a:cs typeface="Arial"/>
-              <a:sym typeface="Arial"/>
-            </a:endParaRPr>
-          </a:p>
-          <a:p>
-            <a:pPr indent="-336550" lvl="0" marL="457200" rtl="0" algn="l">
-              <a:lnSpc>
-                <a:spcPct val="100000"/>
-              </a:lnSpc>
-              <a:spcBef>
-                <a:spcPts val="0"/>
-              </a:spcBef>
-              <a:spcAft>
-                <a:spcPts val="0"/>
-              </a:spcAft>
-              <a:buSzPts val="1700"/>
-              <a:buChar char="●"/>
-            </a:pPr>
-            <a:r>
-              <a:rPr lang="es-CL" sz="1700">
-                <a:latin typeface="Arial"/>
-                <a:ea typeface="Arial"/>
-                <a:cs typeface="Arial"/>
-                <a:sym typeface="Arial"/>
-              </a:rPr>
-              <a:t>Priorizar intervenciones de re-vinculación escolar</a:t>
-            </a:r>
-            <a:endParaRPr sz="1700">
-              <a:latin typeface="Arial"/>
-              <a:ea typeface="Arial"/>
-              <a:cs typeface="Arial"/>
-              <a:sym typeface="Arial"/>
-            </a:endParaRPr>
-          </a:p>
-          <a:p>
-            <a:pPr indent="0" lvl="0" marL="0" rtl="0" algn="l">
-              <a:lnSpc>
-                <a:spcPct val="100000"/>
-              </a:lnSpc>
-              <a:spcBef>
-                <a:spcPts val="2000"/>
-              </a:spcBef>
-              <a:spcAft>
-                <a:spcPts val="0"/>
-              </a:spcAft>
-              <a:buClr>
-                <a:schemeClr val="dk1"/>
-              </a:buClr>
-              <a:buSzPts val="1100"/>
-              <a:buFont typeface="Arial"/>
-              <a:buNone/>
-            </a:pPr>
-            <a:r>
-              <a:rPr b="1" lang="es-CL" sz="1700">
-                <a:latin typeface="Arial"/>
-                <a:ea typeface="Arial"/>
-                <a:cs typeface="Arial"/>
-                <a:sym typeface="Arial"/>
-              </a:rPr>
-              <a:t>¿Como? </a:t>
-            </a:r>
-            <a:endParaRPr b="1" sz="1700">
-              <a:latin typeface="Arial"/>
-              <a:ea typeface="Arial"/>
-              <a:cs typeface="Arial"/>
-              <a:sym typeface="Arial"/>
-            </a:endParaRPr>
-          </a:p>
-          <a:p>
-            <a:pPr indent="-336550" lvl="0" marL="457200" rtl="0" algn="l">
-              <a:lnSpc>
-                <a:spcPct val="100000"/>
-              </a:lnSpc>
-              <a:spcBef>
-                <a:spcPts val="2000"/>
-              </a:spcBef>
-              <a:spcAft>
-                <a:spcPts val="0"/>
-              </a:spcAft>
-              <a:buSzPts val="1700"/>
-              <a:buChar char="●"/>
-            </a:pPr>
-            <a:r>
-              <a:rPr lang="es-CL" sz="1700">
-                <a:latin typeface="Arial"/>
-                <a:ea typeface="Arial"/>
-                <a:cs typeface="Arial"/>
-                <a:sym typeface="Arial"/>
-              </a:rPr>
-              <a:t>Calcular % de asistencia mensual y semestral por estudiante</a:t>
-            </a:r>
-            <a:endParaRPr sz="1700">
-              <a:latin typeface="Arial"/>
-              <a:ea typeface="Arial"/>
-              <a:cs typeface="Arial"/>
-              <a:sym typeface="Arial"/>
-            </a:endParaRPr>
-          </a:p>
-          <a:p>
-            <a:pPr indent="-336550" lvl="0" marL="457200" rtl="0" algn="l">
-              <a:lnSpc>
-                <a:spcPct val="100000"/>
-              </a:lnSpc>
-              <a:spcBef>
-                <a:spcPts val="0"/>
-              </a:spcBef>
-              <a:spcAft>
-                <a:spcPts val="0"/>
-              </a:spcAft>
-              <a:buSzPts val="1700"/>
-              <a:buChar char="●"/>
-            </a:pPr>
-            <a:r>
-              <a:rPr lang="es-CL" sz="1700">
-                <a:latin typeface="Arial"/>
-                <a:ea typeface="Arial"/>
-                <a:cs typeface="Arial"/>
-                <a:sym typeface="Arial"/>
-              </a:rPr>
-              <a:t>Cruzar con promedio de notas por asignatura y general</a:t>
-            </a:r>
-            <a:endParaRPr sz="1700">
-              <a:latin typeface="Arial"/>
-              <a:ea typeface="Arial"/>
-              <a:cs typeface="Arial"/>
-              <a:sym typeface="Arial"/>
-            </a:endParaRPr>
-          </a:p>
-          <a:p>
-            <a:pPr indent="-336550" lvl="0" marL="457200" rtl="0" algn="l">
-              <a:lnSpc>
-                <a:spcPct val="100000"/>
-              </a:lnSpc>
-              <a:spcBef>
-                <a:spcPts val="0"/>
-              </a:spcBef>
-              <a:spcAft>
-                <a:spcPts val="0"/>
-              </a:spcAft>
-              <a:buSzPts val="1700"/>
-              <a:buChar char="●"/>
-            </a:pPr>
-            <a:r>
-              <a:rPr lang="es-CL" sz="1700">
-                <a:latin typeface="Arial"/>
-                <a:ea typeface="Arial"/>
-                <a:cs typeface="Arial"/>
-                <a:sym typeface="Arial"/>
-              </a:rPr>
-              <a:t>Visualizaciones: Gráfico de dispersión (asistencia vs notas)</a:t>
-            </a:r>
-            <a:endParaRPr sz="1700">
-              <a:latin typeface="Arial"/>
-              <a:ea typeface="Arial"/>
-              <a:cs typeface="Arial"/>
-              <a:sym typeface="Arial"/>
-            </a:endParaRPr>
-          </a:p>
-          <a:p>
-            <a:pPr indent="-336550" lvl="0" marL="457200" rtl="0" algn="l">
-              <a:lnSpc>
-                <a:spcPct val="100000"/>
-              </a:lnSpc>
-              <a:spcBef>
-                <a:spcPts val="0"/>
-              </a:spcBef>
-              <a:spcAft>
-                <a:spcPts val="0"/>
-              </a:spcAft>
-              <a:buSzPts val="1700"/>
-              <a:buChar char="●"/>
-            </a:pPr>
-            <a:r>
-              <a:rPr lang="es-CL" sz="1700">
-                <a:latin typeface="Arial"/>
-                <a:ea typeface="Arial"/>
-                <a:cs typeface="Arial"/>
-                <a:sym typeface="Arial"/>
-              </a:rPr>
-              <a:t>Identificar asignaturas más sensibles al ausentismo</a:t>
-            </a:r>
-            <a:endParaRPr sz="1700">
-              <a:latin typeface="Arial"/>
-              <a:ea typeface="Arial"/>
-              <a:cs typeface="Arial"/>
-              <a:sym typeface="Arial"/>
-            </a:endParaRPr>
-          </a:p>
-          <a:p>
-            <a:pPr indent="0" lvl="0" marL="0" rtl="0" algn="l">
-              <a:lnSpc>
-                <a:spcPct val="100000"/>
-              </a:lnSpc>
-              <a:spcBef>
-                <a:spcPts val="2000"/>
-              </a:spcBef>
-              <a:spcAft>
-                <a:spcPts val="600"/>
-              </a:spcAft>
-              <a:buClr>
-                <a:schemeClr val="dk1"/>
-              </a:buClr>
-              <a:buSzPts val="1100"/>
-              <a:buFont typeface="Arial"/>
-              <a:buNone/>
-            </a:pPr>
-            <a:r>
-              <a:rPr b="1" lang="es-CL" sz="1700">
-                <a:latin typeface="Arial"/>
-                <a:ea typeface="Arial"/>
-                <a:cs typeface="Arial"/>
-                <a:sym typeface="Arial"/>
-              </a:rPr>
-              <a:t>Periodicidad</a:t>
-            </a:r>
-            <a:r>
-              <a:rPr lang="es-CL" sz="1700">
-                <a:latin typeface="Arial"/>
-                <a:ea typeface="Arial"/>
-                <a:cs typeface="Arial"/>
-                <a:sym typeface="Arial"/>
-              </a:rPr>
-              <a:t>: Mensual y Semestral</a:t>
-            </a:r>
-            <a:endParaRPr/>
-          </a:p>
-        </p:txBody>
-      </p:sp>
-      <p:sp>
-        <p:nvSpPr>
-          <p:cNvPr id="203" name="Google Shape;203;g3a5502607a1_0_15"/>
-          <p:cNvSpPr txBox="1"/>
-          <p:nvPr/>
-        </p:nvSpPr>
-        <p:spPr>
-          <a:xfrm>
-            <a:off x="136188" y="368928"/>
-            <a:ext cx="12192000" cy="369300"/>
-          </a:xfrm>
-          <a:prstGeom prst="rect">
-            <a:avLst/>
-          </a:prstGeom>
-          <a:noFill/>
-          <a:ln>
-            <a:noFill/>
-          </a:ln>
-        </p:spPr>
-        <p:txBody>
-          <a:bodyPr anchorCtr="0" anchor="t" bIns="45700" lIns="91425" spcFirstLastPara="1" rIns="91425" wrap="square" tIns="45700">
-            <a:spAutoFit/>
-          </a:bodyPr>
-          <a:lstStyle/>
-          <a:p>
-            <a:pPr indent="0" lvl="0" marL="0" marR="0" rtl="0" algn="l">
-              <a:spcBef>
-                <a:spcPts val="0"/>
-              </a:spcBef>
-              <a:spcAft>
-                <a:spcPts val="0"/>
-              </a:spcAft>
-              <a:buNone/>
-            </a:pPr>
-            <a:r>
-              <a:rPr lang="es-CL" sz="1800">
-                <a:solidFill>
-                  <a:srgbClr val="757070"/>
-                </a:solidFill>
-                <a:latin typeface="Calibri"/>
-                <a:ea typeface="Calibri"/>
-                <a:cs typeface="Calibri"/>
-                <a:sym typeface="Calibri"/>
-              </a:rPr>
-              <a:t>PROYECTO “DATA SCHOOL”</a:t>
-            </a:r>
-            <a:endParaRPr/>
-          </a:p>
-        </p:txBody>
-      </p:sp>
-      <p:pic>
-        <p:nvPicPr>
-          <p:cNvPr descr="EscuelaIT Duoc UC - Escuela de Informática y Telecomunicaciones Duoc UC - Duoc  UC | LinkedIn" id="204" name="Google Shape;204;g3a5502607a1_0_15"/>
+          <p:cNvPr descr="EscuelaIT Duoc UC - Escuela de Informática y Telecomunicaciones Duoc UC - Duoc  UC | LinkedIn" id="206" name="Google Shape;206;g3a5502607a1_0_10"/>
           <p:cNvPicPr preferRelativeResize="0"/>
           <p:nvPr/>
         </p:nvPicPr>
@@ -14482,7 +14230,651 @@
   <p:cSld>
     <p:spTree>
       <p:nvGrpSpPr>
-        <p:cNvPr id="208" name="Shape 208"/>
+        <p:cNvPr id="210" name="Shape 210"/>
+        <p:cNvGrpSpPr/>
+        <p:nvPr/>
+      </p:nvGrpSpPr>
+      <p:grpSpPr>
+        <a:xfrm>
+          <a:off x="0" y="0"/>
+          <a:ext cx="0" cy="0"/>
+          <a:chOff x="0" y="0"/>
+          <a:chExt cx="0" cy="0"/>
+        </a:xfrm>
+      </p:grpSpPr>
+      <p:sp>
+        <p:nvSpPr>
+          <p:cNvPr id="211" name="Google Shape;211;g3a5502607a1_0_15"/>
+          <p:cNvSpPr txBox="1"/>
+          <p:nvPr>
+            <p:ph idx="1" type="subTitle"/>
+          </p:nvPr>
+        </p:nvSpPr>
+        <p:spPr>
+          <a:xfrm>
+            <a:off x="458875" y="890125"/>
+            <a:ext cx="10955400" cy="6037800"/>
+          </a:xfrm>
+          <a:prstGeom prst="rect">
+            <a:avLst/>
+          </a:prstGeom>
+        </p:spPr>
+        <p:txBody>
+          <a:bodyPr anchorCtr="0" anchor="t" bIns="45700" lIns="91425" spcFirstLastPara="1" rIns="91425" wrap="square" tIns="45700">
+            <a:normAutofit/>
+          </a:bodyPr>
+          <a:lstStyle/>
+          <a:p>
+            <a:pPr indent="0" lvl="0" marL="0" rtl="0" algn="l">
+              <a:lnSpc>
+                <a:spcPct val="115000"/>
+              </a:lnSpc>
+              <a:spcBef>
+                <a:spcPts val="1200"/>
+              </a:spcBef>
+              <a:spcAft>
+                <a:spcPts val="0"/>
+              </a:spcAft>
+              <a:buClr>
+                <a:schemeClr val="dk1"/>
+              </a:buClr>
+              <a:buSzPts val="1100"/>
+              <a:buFont typeface="Arial"/>
+              <a:buNone/>
+            </a:pPr>
+            <a:r>
+              <a:rPr b="1" lang="es-CL" sz="1500">
+                <a:latin typeface="Arial"/>
+                <a:ea typeface="Arial"/>
+                <a:cs typeface="Arial"/>
+                <a:sym typeface="Arial"/>
+              </a:rPr>
+              <a:t>Análisis de Convivencia y Rendimiento Académico</a:t>
+            </a:r>
+            <a:endParaRPr b="1" sz="1500">
+              <a:latin typeface="Arial"/>
+              <a:ea typeface="Arial"/>
+              <a:cs typeface="Arial"/>
+              <a:sym typeface="Arial"/>
+            </a:endParaRPr>
+          </a:p>
+          <a:p>
+            <a:pPr indent="0" lvl="0" marL="0" rtl="0" algn="l">
+              <a:lnSpc>
+                <a:spcPct val="115000"/>
+              </a:lnSpc>
+              <a:spcBef>
+                <a:spcPts val="1200"/>
+              </a:spcBef>
+              <a:spcAft>
+                <a:spcPts val="0"/>
+              </a:spcAft>
+              <a:buClr>
+                <a:schemeClr val="dk1"/>
+              </a:buClr>
+              <a:buSzPts val="1100"/>
+              <a:buFont typeface="Arial"/>
+              <a:buNone/>
+            </a:pPr>
+            <a:r>
+              <a:rPr b="1" lang="es-CL" sz="1700">
+                <a:latin typeface="Arial"/>
+                <a:ea typeface="Arial"/>
+                <a:cs typeface="Arial"/>
+                <a:sym typeface="Arial"/>
+              </a:rPr>
+              <a:t>¿Qué?</a:t>
+            </a:r>
+            <a:br>
+              <a:rPr b="1" lang="es-CL" sz="1500">
+                <a:latin typeface="Arial"/>
+                <a:ea typeface="Arial"/>
+                <a:cs typeface="Arial"/>
+                <a:sym typeface="Arial"/>
+              </a:rPr>
+            </a:br>
+            <a:r>
+              <a:rPr lang="es-CL" sz="1500">
+                <a:latin typeface="Arial"/>
+                <a:ea typeface="Arial"/>
+                <a:cs typeface="Arial"/>
+                <a:sym typeface="Arial"/>
+              </a:rPr>
+              <a:t> Relacionar las anotaciones positivas y negativas, la dinámica social del aula y el rendimiento académico de los estudiantes.</a:t>
+            </a:r>
+            <a:endParaRPr sz="1500">
+              <a:latin typeface="Arial"/>
+              <a:ea typeface="Arial"/>
+              <a:cs typeface="Arial"/>
+              <a:sym typeface="Arial"/>
+            </a:endParaRPr>
+          </a:p>
+          <a:p>
+            <a:pPr indent="0" lvl="0" marL="0" rtl="0" algn="l">
+              <a:lnSpc>
+                <a:spcPct val="100000"/>
+              </a:lnSpc>
+              <a:spcBef>
+                <a:spcPts val="2000"/>
+              </a:spcBef>
+              <a:spcAft>
+                <a:spcPts val="0"/>
+              </a:spcAft>
+              <a:buNone/>
+            </a:pPr>
+            <a:r>
+              <a:rPr b="1" lang="es-CL" sz="1700">
+                <a:latin typeface="Arial"/>
+                <a:ea typeface="Arial"/>
+                <a:cs typeface="Arial"/>
+                <a:sym typeface="Arial"/>
+              </a:rPr>
+              <a:t>¿Por qué?: </a:t>
+            </a:r>
+            <a:endParaRPr b="1" sz="1500">
+              <a:latin typeface="Arial"/>
+              <a:ea typeface="Arial"/>
+              <a:cs typeface="Arial"/>
+              <a:sym typeface="Arial"/>
+            </a:endParaRPr>
+          </a:p>
+          <a:p>
+            <a:pPr indent="-323850" lvl="0" marL="457200" rtl="0" algn="l">
+              <a:lnSpc>
+                <a:spcPct val="115000"/>
+              </a:lnSpc>
+              <a:spcBef>
+                <a:spcPts val="1200"/>
+              </a:spcBef>
+              <a:spcAft>
+                <a:spcPts val="0"/>
+              </a:spcAft>
+              <a:buSzPts val="1500"/>
+              <a:buChar char="●"/>
+            </a:pPr>
+            <a:r>
+              <a:rPr lang="es-CL" sz="1500">
+                <a:latin typeface="Arial"/>
+                <a:ea typeface="Arial"/>
+                <a:cs typeface="Arial"/>
+                <a:sym typeface="Arial"/>
+              </a:rPr>
+              <a:t>Detectar cómo la convivencia afecta las notas.</a:t>
+            </a:r>
+            <a:endParaRPr sz="1500">
+              <a:latin typeface="Arial"/>
+              <a:ea typeface="Arial"/>
+              <a:cs typeface="Arial"/>
+              <a:sym typeface="Arial"/>
+            </a:endParaRPr>
+          </a:p>
+          <a:p>
+            <a:pPr indent="-323850" lvl="0" marL="457200" rtl="0" algn="l">
+              <a:lnSpc>
+                <a:spcPct val="115000"/>
+              </a:lnSpc>
+              <a:spcBef>
+                <a:spcPts val="0"/>
+              </a:spcBef>
+              <a:spcAft>
+                <a:spcPts val="0"/>
+              </a:spcAft>
+              <a:buSzPts val="1500"/>
+              <a:buChar char="●"/>
+            </a:pPr>
+            <a:r>
+              <a:rPr lang="es-CL" sz="1500">
+                <a:latin typeface="Arial"/>
+                <a:ea typeface="Arial"/>
+                <a:cs typeface="Arial"/>
+                <a:sym typeface="Arial"/>
+              </a:rPr>
+              <a:t>Identificar estudiantes en riesgo por factores sociales.</a:t>
+            </a:r>
+            <a:endParaRPr sz="1500">
+              <a:latin typeface="Arial"/>
+              <a:ea typeface="Arial"/>
+              <a:cs typeface="Arial"/>
+              <a:sym typeface="Arial"/>
+            </a:endParaRPr>
+          </a:p>
+          <a:p>
+            <a:pPr indent="-323850" lvl="0" marL="457200" rtl="0" algn="l">
+              <a:lnSpc>
+                <a:spcPct val="115000"/>
+              </a:lnSpc>
+              <a:spcBef>
+                <a:spcPts val="0"/>
+              </a:spcBef>
+              <a:spcAft>
+                <a:spcPts val="0"/>
+              </a:spcAft>
+              <a:buSzPts val="1500"/>
+              <a:buChar char="●"/>
+            </a:pPr>
+            <a:r>
+              <a:rPr lang="es-CL" sz="1500">
+                <a:latin typeface="Arial"/>
+                <a:ea typeface="Arial"/>
+                <a:cs typeface="Arial"/>
+                <a:sym typeface="Arial"/>
+              </a:rPr>
+              <a:t>Apoyar decisiones de intervención basadas en evidencia.</a:t>
+            </a:r>
+            <a:endParaRPr sz="1500">
+              <a:latin typeface="Arial"/>
+              <a:ea typeface="Arial"/>
+              <a:cs typeface="Arial"/>
+              <a:sym typeface="Arial"/>
+            </a:endParaRPr>
+          </a:p>
+          <a:p>
+            <a:pPr indent="0" lvl="0" marL="0" rtl="0" algn="l">
+              <a:lnSpc>
+                <a:spcPct val="100000"/>
+              </a:lnSpc>
+              <a:spcBef>
+                <a:spcPts val="2000"/>
+              </a:spcBef>
+              <a:spcAft>
+                <a:spcPts val="0"/>
+              </a:spcAft>
+              <a:buNone/>
+            </a:pPr>
+            <a:r>
+              <a:rPr b="1" lang="es-CL" sz="1700">
+                <a:latin typeface="Arial"/>
+                <a:ea typeface="Arial"/>
+                <a:cs typeface="Arial"/>
+                <a:sym typeface="Arial"/>
+              </a:rPr>
+              <a:t>¿Como?:</a:t>
+            </a:r>
+            <a:endParaRPr b="1" sz="1500">
+              <a:latin typeface="Arial"/>
+              <a:ea typeface="Arial"/>
+              <a:cs typeface="Arial"/>
+              <a:sym typeface="Arial"/>
+            </a:endParaRPr>
+          </a:p>
+          <a:p>
+            <a:pPr indent="-323850" lvl="0" marL="457200" rtl="0" algn="l">
+              <a:lnSpc>
+                <a:spcPct val="115000"/>
+              </a:lnSpc>
+              <a:spcBef>
+                <a:spcPts val="1200"/>
+              </a:spcBef>
+              <a:spcAft>
+                <a:spcPts val="0"/>
+              </a:spcAft>
+              <a:buSzPts val="1500"/>
+              <a:buChar char="●"/>
+            </a:pPr>
+            <a:r>
+              <a:rPr lang="es-CL" sz="1500">
+                <a:latin typeface="Arial"/>
+                <a:ea typeface="Arial"/>
+                <a:cs typeface="Arial"/>
+                <a:sym typeface="Arial"/>
+              </a:rPr>
+              <a:t>Registrar anotaciones por estudiante.</a:t>
+            </a:r>
+            <a:endParaRPr sz="1500">
+              <a:latin typeface="Arial"/>
+              <a:ea typeface="Arial"/>
+              <a:cs typeface="Arial"/>
+              <a:sym typeface="Arial"/>
+            </a:endParaRPr>
+          </a:p>
+          <a:p>
+            <a:pPr indent="-323850" lvl="0" marL="457200" rtl="0" algn="l">
+              <a:lnSpc>
+                <a:spcPct val="115000"/>
+              </a:lnSpc>
+              <a:spcBef>
+                <a:spcPts val="0"/>
+              </a:spcBef>
+              <a:spcAft>
+                <a:spcPts val="0"/>
+              </a:spcAft>
+              <a:buSzPts val="1500"/>
+              <a:buChar char="●"/>
+            </a:pPr>
+            <a:r>
+              <a:rPr lang="es-CL" sz="1500">
+                <a:latin typeface="Arial"/>
+                <a:ea typeface="Arial"/>
+                <a:cs typeface="Arial"/>
+                <a:sym typeface="Arial"/>
+              </a:rPr>
+              <a:t>Cons</a:t>
+            </a:r>
+            <a:r>
+              <a:rPr lang="es-CL" sz="1500">
+                <a:latin typeface="Arial"/>
+                <a:ea typeface="Arial"/>
+                <a:cs typeface="Arial"/>
+                <a:sym typeface="Arial"/>
+              </a:rPr>
+              <a:t>i</a:t>
+            </a:r>
+            <a:r>
+              <a:rPr lang="es-CL" sz="1500">
+                <a:latin typeface="Arial"/>
+                <a:ea typeface="Arial"/>
+                <a:cs typeface="Arial"/>
+                <a:sym typeface="Arial"/>
+              </a:rPr>
+              <a:t>derar ubicación en sala y compañeros cercanos.</a:t>
+            </a:r>
+            <a:endParaRPr sz="1500">
+              <a:latin typeface="Arial"/>
+              <a:ea typeface="Arial"/>
+              <a:cs typeface="Arial"/>
+              <a:sym typeface="Arial"/>
+            </a:endParaRPr>
+          </a:p>
+          <a:p>
+            <a:pPr indent="-323850" lvl="0" marL="457200" rtl="0" algn="l">
+              <a:lnSpc>
+                <a:spcPct val="115000"/>
+              </a:lnSpc>
+              <a:spcBef>
+                <a:spcPts val="0"/>
+              </a:spcBef>
+              <a:spcAft>
+                <a:spcPts val="0"/>
+              </a:spcAft>
+              <a:buSzPts val="1500"/>
+              <a:buChar char="●"/>
+            </a:pPr>
+            <a:r>
+              <a:rPr lang="es-CL" sz="1500">
+                <a:latin typeface="Arial"/>
+                <a:ea typeface="Arial"/>
+                <a:cs typeface="Arial"/>
+                <a:sym typeface="Arial"/>
+              </a:rPr>
+              <a:t>Cruzar datos con promedios académicos.</a:t>
+            </a:r>
+            <a:endParaRPr sz="1500">
+              <a:latin typeface="Arial"/>
+              <a:ea typeface="Arial"/>
+              <a:cs typeface="Arial"/>
+              <a:sym typeface="Arial"/>
+            </a:endParaRPr>
+          </a:p>
+          <a:p>
+            <a:pPr indent="-323850" lvl="0" marL="457200" rtl="0" algn="l">
+              <a:lnSpc>
+                <a:spcPct val="115000"/>
+              </a:lnSpc>
+              <a:spcBef>
+                <a:spcPts val="0"/>
+              </a:spcBef>
+              <a:spcAft>
+                <a:spcPts val="0"/>
+              </a:spcAft>
+              <a:buSzPts val="1500"/>
+              <a:buChar char="●"/>
+            </a:pPr>
+            <a:r>
+              <a:rPr lang="es-CL" sz="1500">
+                <a:latin typeface="Arial"/>
+                <a:ea typeface="Arial"/>
+                <a:cs typeface="Arial"/>
+                <a:sym typeface="Arial"/>
+              </a:rPr>
+              <a:t>Visualizaciones:</a:t>
+            </a:r>
+            <a:endParaRPr sz="1500">
+              <a:latin typeface="Arial"/>
+              <a:ea typeface="Arial"/>
+              <a:cs typeface="Arial"/>
+              <a:sym typeface="Arial"/>
+            </a:endParaRPr>
+          </a:p>
+          <a:p>
+            <a:pPr indent="-323850" lvl="1" marL="914400" rtl="0" algn="l">
+              <a:lnSpc>
+                <a:spcPct val="115000"/>
+              </a:lnSpc>
+              <a:spcBef>
+                <a:spcPts val="0"/>
+              </a:spcBef>
+              <a:spcAft>
+                <a:spcPts val="0"/>
+              </a:spcAft>
+              <a:buSzPts val="1500"/>
+              <a:buChar char="○"/>
+            </a:pPr>
+            <a:r>
+              <a:rPr lang="es-CL" sz="1500">
+                <a:latin typeface="Arial"/>
+                <a:ea typeface="Arial"/>
+                <a:cs typeface="Arial"/>
+                <a:sym typeface="Arial"/>
+              </a:rPr>
+              <a:t>Gráfico conducta vs notas</a:t>
+            </a:r>
+            <a:endParaRPr sz="1500">
+              <a:latin typeface="Arial"/>
+              <a:ea typeface="Arial"/>
+              <a:cs typeface="Arial"/>
+              <a:sym typeface="Arial"/>
+            </a:endParaRPr>
+          </a:p>
+          <a:p>
+            <a:pPr indent="-323850" lvl="1" marL="914400" rtl="0" algn="l">
+              <a:lnSpc>
+                <a:spcPct val="115000"/>
+              </a:lnSpc>
+              <a:spcBef>
+                <a:spcPts val="0"/>
+              </a:spcBef>
+              <a:spcAft>
+                <a:spcPts val="0"/>
+              </a:spcAft>
+              <a:buSzPts val="1500"/>
+              <a:buChar char="○"/>
+            </a:pPr>
+            <a:r>
+              <a:rPr lang="es-CL" sz="1500">
+                <a:latin typeface="Arial"/>
+                <a:ea typeface="Arial"/>
+                <a:cs typeface="Arial"/>
+                <a:sym typeface="Arial"/>
+              </a:rPr>
+              <a:t>Mapa de aula con convivencia y rendimiento</a:t>
+            </a:r>
+            <a:br>
+              <a:rPr lang="es-CL" sz="1500">
+                <a:latin typeface="Arial"/>
+                <a:ea typeface="Arial"/>
+                <a:cs typeface="Arial"/>
+                <a:sym typeface="Arial"/>
+              </a:rPr>
+            </a:br>
+            <a:endParaRPr sz="1500">
+              <a:latin typeface="Arial"/>
+              <a:ea typeface="Arial"/>
+              <a:cs typeface="Arial"/>
+              <a:sym typeface="Arial"/>
+            </a:endParaRPr>
+          </a:p>
+          <a:p>
+            <a:pPr indent="0" lvl="0" marL="0" rtl="0" algn="l">
+              <a:lnSpc>
+                <a:spcPct val="115000"/>
+              </a:lnSpc>
+              <a:spcBef>
+                <a:spcPts val="1200"/>
+              </a:spcBef>
+              <a:spcAft>
+                <a:spcPts val="0"/>
+              </a:spcAft>
+              <a:buClr>
+                <a:schemeClr val="dk1"/>
+              </a:buClr>
+              <a:buSzPts val="1100"/>
+              <a:buFont typeface="Arial"/>
+              <a:buNone/>
+            </a:pPr>
+            <a:r>
+              <a:rPr b="1" lang="es-CL" sz="1500">
+                <a:latin typeface="Arial"/>
+                <a:ea typeface="Arial"/>
+                <a:cs typeface="Arial"/>
+                <a:sym typeface="Arial"/>
+              </a:rPr>
+              <a:t>Periodicidad:</a:t>
+            </a:r>
+            <a:br>
+              <a:rPr b="1" lang="es-CL" sz="1500">
+                <a:latin typeface="Arial"/>
+                <a:ea typeface="Arial"/>
+                <a:cs typeface="Arial"/>
+                <a:sym typeface="Arial"/>
+              </a:rPr>
+            </a:br>
+            <a:r>
+              <a:rPr lang="es-CL" sz="1500">
+                <a:latin typeface="Arial"/>
+                <a:ea typeface="Arial"/>
+                <a:cs typeface="Arial"/>
+                <a:sym typeface="Arial"/>
+              </a:rPr>
+              <a:t> Mensual con revisión semestral.</a:t>
+            </a:r>
+            <a:endParaRPr sz="1500">
+              <a:latin typeface="Arial"/>
+              <a:ea typeface="Arial"/>
+              <a:cs typeface="Arial"/>
+              <a:sym typeface="Arial"/>
+            </a:endParaRPr>
+          </a:p>
+          <a:p>
+            <a:pPr indent="0" lvl="0" marL="0" rtl="0" algn="l">
+              <a:lnSpc>
+                <a:spcPct val="115000"/>
+              </a:lnSpc>
+              <a:spcBef>
+                <a:spcPts val="1200"/>
+              </a:spcBef>
+              <a:spcAft>
+                <a:spcPts val="1200"/>
+              </a:spcAft>
+              <a:buClr>
+                <a:schemeClr val="dk1"/>
+              </a:buClr>
+              <a:buSzPts val="1100"/>
+              <a:buFont typeface="Arial"/>
+              <a:buNone/>
+            </a:pPr>
+            <a:r>
+              <a:t/>
+            </a:r>
+            <a:endParaRPr b="1" sz="1100">
+              <a:latin typeface="Arial"/>
+              <a:ea typeface="Arial"/>
+              <a:cs typeface="Arial"/>
+              <a:sym typeface="Arial"/>
+            </a:endParaRPr>
+          </a:p>
+        </p:txBody>
+      </p:sp>
+      <p:sp>
+        <p:nvSpPr>
+          <p:cNvPr id="212" name="Google Shape;212;g3a5502607a1_0_15"/>
+          <p:cNvSpPr txBox="1"/>
+          <p:nvPr/>
+        </p:nvSpPr>
+        <p:spPr>
+          <a:xfrm>
+            <a:off x="124488" y="368928"/>
+            <a:ext cx="12192000" cy="369300"/>
+          </a:xfrm>
+          <a:prstGeom prst="rect">
+            <a:avLst/>
+          </a:prstGeom>
+          <a:noFill/>
+          <a:ln>
+            <a:noFill/>
+          </a:ln>
+        </p:spPr>
+        <p:txBody>
+          <a:bodyPr anchorCtr="0" anchor="t" bIns="45700" lIns="91425" spcFirstLastPara="1" rIns="91425" wrap="square" tIns="45700">
+            <a:spAutoFit/>
+          </a:bodyPr>
+          <a:lstStyle/>
+          <a:p>
+            <a:pPr indent="0" lvl="0" marL="0" marR="0" rtl="0" algn="l">
+              <a:spcBef>
+                <a:spcPts val="0"/>
+              </a:spcBef>
+              <a:spcAft>
+                <a:spcPts val="0"/>
+              </a:spcAft>
+              <a:buNone/>
+            </a:pPr>
+            <a:r>
+              <a:rPr lang="es-CL" sz="1800">
+                <a:solidFill>
+                  <a:srgbClr val="757070"/>
+                </a:solidFill>
+                <a:latin typeface="Calibri"/>
+                <a:ea typeface="Calibri"/>
+                <a:cs typeface="Calibri"/>
+                <a:sym typeface="Calibri"/>
+              </a:rPr>
+              <a:t>PROYECTO “DATA SCHOOL”</a:t>
+            </a:r>
+            <a:endParaRPr/>
+          </a:p>
+        </p:txBody>
+      </p:sp>
+      <p:pic>
+        <p:nvPicPr>
+          <p:cNvPr descr="EscuelaIT Duoc UC - Escuela de Informática y Telecomunicaciones Duoc UC - Duoc  UC | LinkedIn" id="213" name="Google Shape;213;g3a5502607a1_0_15"/>
+          <p:cNvPicPr preferRelativeResize="0"/>
+          <p:nvPr/>
+        </p:nvPicPr>
+        <p:blipFill rotWithShape="1">
+          <a:blip r:embed="rId3">
+            <a:alphaModFix/>
+          </a:blip>
+          <a:srcRect b="0" l="0" r="0" t="0"/>
+          <a:stretch/>
+        </p:blipFill>
+        <p:spPr>
+          <a:xfrm>
+            <a:off x="8772152" y="207550"/>
+            <a:ext cx="3141406" cy="785352"/>
+          </a:xfrm>
+          <a:prstGeom prst="rect">
+            <a:avLst/>
+          </a:prstGeom>
+          <a:noFill/>
+          <a:ln>
+            <a:noFill/>
+          </a:ln>
+        </p:spPr>
+      </p:pic>
+    </p:spTree>
+  </p:cSld>
+  <p:clrMapOvr>
+    <a:masterClrMapping/>
+  </p:clrMapOvr>
+</p:sld>
+</file>
+
+<file path=ppt/slides/slide15.xml><?xml version="1.0" encoding="utf-8"?>
+<p:sld xmlns:a="http://schemas.openxmlformats.org/drawingml/2006/main" xmlns:r="http://schemas.openxmlformats.org/officeDocument/2006/relationships" xmlns:mc="http://schemas.openxmlformats.org/markup-compatibility/2006" xmlns:mv="urn:schemas-microsoft-com:mac:vml" xmlns:p="http://schemas.openxmlformats.org/presentationml/2006/main" xmlns:c="http://schemas.openxmlformats.org/drawingml/2006/chart" xmlns:dgm="http://schemas.openxmlformats.org/drawingml/2006/diagram" xmlns:o="urn:schemas-microsoft-com:office:office" xmlns:v="urn:schemas-microsoft-com:vml" xmlns:pvml="urn:schemas-microsoft-com:office:powerpoint" xmlns:com="http://schemas.openxmlformats.org/drawingml/2006/compatibility" xmlns:p14="http://schemas.microsoft.com/office/powerpoint/2010/main" xmlns:p15="http://schemas.microsoft.com/office/powerpoint/2012/main" xmlns:ahyp="http://schemas.microsoft.com/office/drawing/2018/hyperlinkcolor">
+  <p:cSld>
+    <p:spTree>
+      <p:nvGrpSpPr>
+        <p:cNvPr id="217" name="Shape 217"/>
         <p:cNvGrpSpPr/>
         <p:nvPr/>
       </p:nvGrpSpPr>
@@ -14496,7 +14888,7 @@
       </p:grpSpPr>
       <p:pic>
         <p:nvPicPr>
-          <p:cNvPr descr="EscuelaIT Duoc UC - Escuela de Informática y Telecomunicaciones Duoc UC - Duoc  UC | LinkedIn" id="209" name="Google Shape;209;p12"/>
+          <p:cNvPr descr="EscuelaIT Duoc UC - Escuela de Informática y Telecomunicaciones Duoc UC - Duoc  UC | LinkedIn" id="218" name="Google Shape;218;p12"/>
           <p:cNvPicPr preferRelativeResize="0"/>
           <p:nvPr/>
         </p:nvPicPr>
@@ -14523,7 +14915,7 @@
       </p:pic>
       <p:sp>
         <p:nvSpPr>
-          <p:cNvPr id="210" name="Google Shape;210;p12"/>
+          <p:cNvPr id="219" name="Google Shape;219;p12"/>
           <p:cNvSpPr txBox="1"/>
           <p:nvPr/>
         </p:nvSpPr>
@@ -14597,14 +14989,14 @@
       </p:sp>
       <p:sp>
         <p:nvSpPr>
-          <p:cNvPr id="211" name="Google Shape;211;p12"/>
+          <p:cNvPr id="220" name="Google Shape;220;p12"/>
           <p:cNvSpPr txBox="1"/>
           <p:nvPr/>
         </p:nvSpPr>
         <p:spPr>
           <a:xfrm>
-            <a:off x="0" y="1432655"/>
-            <a:ext cx="12191999" cy="646331"/>
+            <a:off x="0" y="1152180"/>
+            <a:ext cx="12192000" cy="646500"/>
           </a:xfrm>
           <a:prstGeom prst="rect">
             <a:avLst/>
@@ -14647,7 +15039,7 @@
       </p:sp>
       <p:cxnSp>
         <p:nvCxnSpPr>
-          <p:cNvPr id="212" name="Google Shape;212;p12"/>
+          <p:cNvPr id="221" name="Google Shape;221;p12"/>
           <p:cNvCxnSpPr/>
           <p:nvPr/>
         </p:nvCxnSpPr>
@@ -14673,14 +15065,14 @@
       </p:cxnSp>
       <p:sp>
         <p:nvSpPr>
-          <p:cNvPr id="213" name="Google Shape;213;p12"/>
+          <p:cNvPr id="222" name="Google Shape;222;p12"/>
           <p:cNvSpPr txBox="1"/>
           <p:nvPr/>
         </p:nvSpPr>
         <p:spPr>
           <a:xfrm>
             <a:off x="324575" y="2387500"/>
-            <a:ext cx="11450700" cy="1500900"/>
+            <a:ext cx="11470800" cy="4221900"/>
           </a:xfrm>
           <a:prstGeom prst="rect">
             <a:avLst/>
@@ -15011,7 +15403,7 @@
               </a:rPr>
               <a:t>PostgreSQL + Auth) </a:t>
             </a:r>
-            <a:endParaRPr sz="2800">
+            <a:endParaRPr sz="1800">
               <a:solidFill>
                 <a:schemeClr val="dk1"/>
               </a:solidFill>
@@ -15025,7 +15417,7 @@
       </p:sp>
       <p:pic>
         <p:nvPicPr>
-          <p:cNvPr id="214" name="Google Shape;214;p12" title="Vue.js_Logo_2.svg.png"/>
+          <p:cNvPr id="223" name="Google Shape;223;p12" title="Vue.js_Logo_2.svg.png"/>
           <p:cNvPicPr preferRelativeResize="0"/>
           <p:nvPr/>
         </p:nvPicPr>
@@ -15039,7 +15431,7 @@
         </p:blipFill>
         <p:spPr>
           <a:xfrm>
-            <a:off x="5696899" y="2387500"/>
+            <a:off x="5585849" y="2324400"/>
             <a:ext cx="798198" cy="691399"/>
           </a:xfrm>
           <a:prstGeom prst="rect">
@@ -15053,7 +15445,7 @@
       </p:pic>
       <p:pic>
         <p:nvPicPr>
-          <p:cNvPr id="215" name="Google Shape;215;p12" title="ts.png"/>
+          <p:cNvPr id="224" name="Google Shape;224;p12" title="ts.png"/>
           <p:cNvPicPr preferRelativeResize="0"/>
           <p:nvPr/>
         </p:nvPicPr>
@@ -15067,7 +15459,7 @@
         </p:blipFill>
         <p:spPr>
           <a:xfrm>
-            <a:off x="6996000" y="2387500"/>
+            <a:off x="7006900" y="2324400"/>
             <a:ext cx="691400" cy="691400"/>
           </a:xfrm>
           <a:prstGeom prst="rect">
@@ -15081,7 +15473,7 @@
       </p:pic>
       <p:pic>
         <p:nvPicPr>
-          <p:cNvPr id="216" name="Google Shape;216;p12" title="supabase.png"/>
+          <p:cNvPr id="225" name="Google Shape;225;p12" title="supabase.png"/>
           <p:cNvPicPr preferRelativeResize="0"/>
           <p:nvPr/>
         </p:nvPicPr>
@@ -15095,7 +15487,7 @@
         </p:blipFill>
         <p:spPr>
           <a:xfrm>
-            <a:off x="5770550" y="5286100"/>
+            <a:off x="5770550" y="4672525"/>
             <a:ext cx="923275" cy="923275"/>
           </a:xfrm>
           <a:prstGeom prst="rect">
@@ -15109,7 +15501,7 @@
       </p:pic>
       <p:pic>
         <p:nvPicPr>
-          <p:cNvPr id="217" name="Google Shape;217;p12" title="Node.js_logo.svg.png"/>
+          <p:cNvPr id="226" name="Google Shape;226;p12" title="Node.js_logo.svg.png"/>
           <p:cNvPicPr preferRelativeResize="0"/>
           <p:nvPr/>
         </p:nvPicPr>
@@ -15123,7 +15515,7 @@
         </p:blipFill>
         <p:spPr>
           <a:xfrm>
-            <a:off x="5103004" y="3333375"/>
+            <a:off x="5113054" y="3234025"/>
             <a:ext cx="1893852" cy="1159624"/>
           </a:xfrm>
           <a:prstGeom prst="rect">
@@ -15137,7 +15529,7 @@
       </p:pic>
       <p:pic>
         <p:nvPicPr>
-          <p:cNvPr id="218" name="Google Shape;218;p12" title="icons8-express-js.png"/>
+          <p:cNvPr id="227" name="Google Shape;227;p12" title="icons8-express-js.png"/>
           <p:cNvPicPr preferRelativeResize="0"/>
           <p:nvPr/>
         </p:nvPicPr>
@@ -15151,7 +15543,7 @@
         </p:blipFill>
         <p:spPr>
           <a:xfrm>
-            <a:off x="7609177" y="3387413"/>
+            <a:off x="7404652" y="3141988"/>
             <a:ext cx="1133750" cy="1133750"/>
           </a:xfrm>
           <a:prstGeom prst="rect">
@@ -15174,12 +15566,12 @@
 </p:sld>
 </file>
 
-<file path=ppt/slides/slide15.xml><?xml version="1.0" encoding="utf-8"?>
+<file path=ppt/slides/slide16.xml><?xml version="1.0" encoding="utf-8"?>
 <p:sld xmlns:a="http://schemas.openxmlformats.org/drawingml/2006/main" xmlns:r="http://schemas.openxmlformats.org/officeDocument/2006/relationships" xmlns:mc="http://schemas.openxmlformats.org/markup-compatibility/2006" xmlns:mv="urn:schemas-microsoft-com:mac:vml" xmlns:p="http://schemas.openxmlformats.org/presentationml/2006/main" xmlns:c="http://schemas.openxmlformats.org/drawingml/2006/chart" xmlns:dgm="http://schemas.openxmlformats.org/drawingml/2006/diagram" xmlns:o="urn:schemas-microsoft-com:office:office" xmlns:v="urn:schemas-microsoft-com:vml" xmlns:pvml="urn:schemas-microsoft-com:office:powerpoint" xmlns:com="http://schemas.openxmlformats.org/drawingml/2006/compatibility" xmlns:p14="http://schemas.microsoft.com/office/powerpoint/2010/main" xmlns:p15="http://schemas.microsoft.com/office/powerpoint/2012/main" xmlns:ahyp="http://schemas.microsoft.com/office/drawing/2018/hyperlinkcolor">
   <p:cSld>
     <p:spTree>
       <p:nvGrpSpPr>
-        <p:cNvPr id="222" name="Shape 222"/>
+        <p:cNvPr id="231" name="Shape 231"/>
         <p:cNvGrpSpPr/>
         <p:nvPr/>
       </p:nvGrpSpPr>
@@ -15193,7 +15585,7 @@
       </p:grpSpPr>
       <p:pic>
         <p:nvPicPr>
-          <p:cNvPr descr="EscuelaIT Duoc UC - Escuela de Informática y Telecomunicaciones Duoc UC - Duoc  UC | LinkedIn" id="223" name="Google Shape;223;p13"/>
+          <p:cNvPr descr="EscuelaIT Duoc UC - Escuela de Informática y Telecomunicaciones Duoc UC - Duoc  UC | LinkedIn" id="232" name="Google Shape;232;p13"/>
           <p:cNvPicPr preferRelativeResize="0"/>
           <p:nvPr/>
         </p:nvPicPr>
@@ -15220,7 +15612,7 @@
       </p:pic>
       <p:sp>
         <p:nvSpPr>
-          <p:cNvPr id="224" name="Google Shape;224;p13"/>
+          <p:cNvPr id="233" name="Google Shape;233;p13"/>
           <p:cNvSpPr txBox="1"/>
           <p:nvPr/>
         </p:nvSpPr>
@@ -15270,7 +15662,7 @@
       </p:sp>
       <p:sp>
         <p:nvSpPr>
-          <p:cNvPr id="225" name="Google Shape;225;p13"/>
+          <p:cNvPr id="234" name="Google Shape;234;p13"/>
           <p:cNvSpPr txBox="1"/>
           <p:nvPr/>
         </p:nvSpPr>
@@ -15320,14 +15712,14 @@
       </p:sp>
       <p:sp>
         <p:nvSpPr>
-          <p:cNvPr id="226" name="Google Shape;226;p13"/>
+          <p:cNvPr id="235" name="Google Shape;235;p13"/>
           <p:cNvSpPr txBox="1"/>
           <p:nvPr/>
         </p:nvSpPr>
         <p:spPr>
           <a:xfrm>
             <a:off x="527075" y="2579850"/>
-            <a:ext cx="11111400" cy="3744900"/>
+            <a:ext cx="11111400" cy="2805300"/>
           </a:xfrm>
           <a:prstGeom prst="rect">
             <a:avLst/>
@@ -15404,7 +15796,155 @@
                 <a:cs typeface="Calibri"/>
                 <a:sym typeface="Calibri"/>
               </a:rPr>
-              <a:t>Nos falto lo relacionado a los modulos analiticos</a:t>
+              <a:t>Gestión completa de cursos y asignaturas</a:t>
+            </a:r>
+            <a:endParaRPr sz="2800">
+              <a:solidFill>
+                <a:schemeClr val="dk1"/>
+              </a:solidFill>
+              <a:latin typeface="Calibri"/>
+              <a:ea typeface="Calibri"/>
+              <a:cs typeface="Calibri"/>
+              <a:sym typeface="Calibri"/>
+            </a:endParaRPr>
+          </a:p>
+          <a:p>
+            <a:pPr indent="-406400" lvl="0" marL="457200" rtl="0" algn="l">
+              <a:spcBef>
+                <a:spcPts val="0"/>
+              </a:spcBef>
+              <a:spcAft>
+                <a:spcPts val="0"/>
+              </a:spcAft>
+              <a:buClr>
+                <a:schemeClr val="dk1"/>
+              </a:buClr>
+              <a:buSzPts val="2800"/>
+              <a:buFont typeface="Calibri"/>
+              <a:buChar char="●"/>
+            </a:pPr>
+            <a:r>
+              <a:rPr lang="es-CL" sz="2800">
+                <a:solidFill>
+                  <a:schemeClr val="dk1"/>
+                </a:solidFill>
+                <a:latin typeface="Calibri"/>
+                <a:ea typeface="Calibri"/>
+                <a:cs typeface="Calibri"/>
+                <a:sym typeface="Calibri"/>
+              </a:rPr>
+              <a:t>Falto modulos analiticos</a:t>
+            </a:r>
+            <a:endParaRPr sz="2800">
+              <a:solidFill>
+                <a:schemeClr val="dk1"/>
+              </a:solidFill>
+              <a:latin typeface="Calibri"/>
+              <a:ea typeface="Calibri"/>
+              <a:cs typeface="Calibri"/>
+              <a:sym typeface="Calibri"/>
+            </a:endParaRPr>
+          </a:p>
+          <a:p>
+            <a:pPr indent="-406400" lvl="0" marL="457200" rtl="0" algn="l">
+              <a:spcBef>
+                <a:spcPts val="0"/>
+              </a:spcBef>
+              <a:spcAft>
+                <a:spcPts val="0"/>
+              </a:spcAft>
+              <a:buClr>
+                <a:schemeClr val="dk1"/>
+              </a:buClr>
+              <a:buSzPts val="2800"/>
+              <a:buFont typeface="Calibri"/>
+              <a:buChar char="●"/>
+            </a:pPr>
+            <a:r>
+              <a:rPr lang="es-CL" sz="2800">
+                <a:solidFill>
+                  <a:schemeClr val="dk1"/>
+                </a:solidFill>
+                <a:latin typeface="Calibri"/>
+                <a:ea typeface="Calibri"/>
+                <a:cs typeface="Calibri"/>
+                <a:sym typeface="Calibri"/>
+              </a:rPr>
+              <a:t>Módulo de calificaciones con cálculo automático</a:t>
+            </a:r>
+            <a:endParaRPr sz="2800">
+              <a:solidFill>
+                <a:schemeClr val="dk1"/>
+              </a:solidFill>
+              <a:latin typeface="Calibri"/>
+              <a:ea typeface="Calibri"/>
+              <a:cs typeface="Calibri"/>
+              <a:sym typeface="Calibri"/>
+            </a:endParaRPr>
+          </a:p>
+          <a:p>
+            <a:pPr indent="-406400" lvl="0" marL="457200" rtl="0" algn="l">
+              <a:spcBef>
+                <a:spcPts val="0"/>
+              </a:spcBef>
+              <a:spcAft>
+                <a:spcPts val="0"/>
+              </a:spcAft>
+              <a:buClr>
+                <a:schemeClr val="dk1"/>
+              </a:buClr>
+              <a:buSzPts val="2800"/>
+              <a:buFont typeface="Calibri"/>
+              <a:buChar char="●"/>
+            </a:pPr>
+            <a:r>
+              <a:rPr lang="es-CL" sz="2800">
+                <a:solidFill>
+                  <a:schemeClr val="dk1"/>
+                </a:solidFill>
+                <a:latin typeface="Calibri"/>
+                <a:ea typeface="Calibri"/>
+                <a:cs typeface="Calibri"/>
+                <a:sym typeface="Calibri"/>
+              </a:rPr>
+              <a:t>Base de datos con alrededor de 25 tablas operativas</a:t>
+            </a:r>
+            <a:endParaRPr sz="2800">
+              <a:solidFill>
+                <a:schemeClr val="dk1"/>
+              </a:solidFill>
+              <a:latin typeface="Calibri"/>
+              <a:ea typeface="Calibri"/>
+              <a:cs typeface="Calibri"/>
+              <a:sym typeface="Calibri"/>
+            </a:endParaRPr>
+          </a:p>
+          <a:p>
+            <a:pPr indent="-406400" lvl="0" marL="457200" rtl="0" algn="l">
+              <a:spcBef>
+                <a:spcPts val="0"/>
+              </a:spcBef>
+              <a:spcAft>
+                <a:spcPts val="0"/>
+              </a:spcAft>
+              <a:buClr>
+                <a:schemeClr val="dk1"/>
+              </a:buClr>
+              <a:buSzPts val="2800"/>
+              <a:buFont typeface="Calibri"/>
+              <a:buChar char="●"/>
+            </a:pPr>
+            <a:r>
+              <a:rPr lang="es-CL" sz="2800">
+                <a:solidFill>
+                  <a:schemeClr val="dk1"/>
+                </a:solidFill>
+                <a:latin typeface="Calibri"/>
+                <a:ea typeface="Calibri"/>
+                <a:cs typeface="Calibri"/>
+                <a:sym typeface="Calibri"/>
+              </a:rPr>
+              <a:t>Interfaz responsiva</a:t>
             </a:r>
             <a:endParaRPr sz="2800">
               <a:solidFill>
@@ -15429,12 +15969,12 @@
 </p:sld>
 </file>
 
-<file path=ppt/slides/slide16.xml><?xml version="1.0" encoding="utf-8"?>
+<file path=ppt/slides/slide17.xml><?xml version="1.0" encoding="utf-8"?>
 <p:sld xmlns:a="http://schemas.openxmlformats.org/drawingml/2006/main" xmlns:r="http://schemas.openxmlformats.org/officeDocument/2006/relationships" xmlns:mc="http://schemas.openxmlformats.org/markup-compatibility/2006" xmlns:mv="urn:schemas-microsoft-com:mac:vml" xmlns:p="http://schemas.openxmlformats.org/presentationml/2006/main" xmlns:c="http://schemas.openxmlformats.org/drawingml/2006/chart" xmlns:dgm="http://schemas.openxmlformats.org/drawingml/2006/diagram" xmlns:o="urn:schemas-microsoft-com:office:office" xmlns:v="urn:schemas-microsoft-com:vml" xmlns:pvml="urn:schemas-microsoft-com:office:powerpoint" xmlns:com="http://schemas.openxmlformats.org/drawingml/2006/compatibility" xmlns:p14="http://schemas.microsoft.com/office/powerpoint/2010/main" xmlns:p15="http://schemas.microsoft.com/office/powerpoint/2012/main" xmlns:ahyp="http://schemas.microsoft.com/office/drawing/2018/hyperlinkcolor">
   <p:cSld>
     <p:spTree>
       <p:nvGrpSpPr>
-        <p:cNvPr id="230" name="Shape 230"/>
+        <p:cNvPr id="239" name="Shape 239"/>
         <p:cNvGrpSpPr/>
         <p:nvPr/>
       </p:nvGrpSpPr>
@@ -15448,7 +15988,7 @@
       </p:grpSpPr>
       <p:pic>
         <p:nvPicPr>
-          <p:cNvPr descr="EscuelaIT Duoc UC - Escuela de Informática y Telecomunicaciones Duoc UC - Duoc  UC | LinkedIn" id="231" name="Google Shape;231;p14"/>
+          <p:cNvPr descr="EscuelaIT Duoc UC - Escuela de Informática y Telecomunicaciones Duoc UC - Duoc  UC | LinkedIn" id="240" name="Google Shape;240;p14"/>
           <p:cNvPicPr preferRelativeResize="0"/>
           <p:nvPr/>
         </p:nvPicPr>
@@ -15475,7 +16015,7 @@
       </p:pic>
       <p:sp>
         <p:nvSpPr>
-          <p:cNvPr id="232" name="Google Shape;232;p14"/>
+          <p:cNvPr id="241" name="Google Shape;241;p14"/>
           <p:cNvSpPr txBox="1"/>
           <p:nvPr/>
         </p:nvSpPr>
@@ -15525,13 +16065,13 @@
       </p:sp>
       <p:sp>
         <p:nvSpPr>
-          <p:cNvPr id="233" name="Google Shape;233;p14"/>
+          <p:cNvPr id="242" name="Google Shape;242;p14"/>
           <p:cNvSpPr txBox="1"/>
           <p:nvPr/>
         </p:nvSpPr>
         <p:spPr>
           <a:xfrm>
-            <a:off x="712000" y="2287025"/>
+            <a:off x="678900" y="2167175"/>
             <a:ext cx="10834200" cy="4053300"/>
           </a:xfrm>
           <a:prstGeom prst="rect">
@@ -15548,7 +16088,7 @@
           </a:bodyPr>
           <a:lstStyle/>
           <a:p>
-            <a:pPr indent="-342900" lvl="0" marL="457200" rtl="0" algn="l">
+            <a:pPr indent="-406400" lvl="0" marL="457200" rtl="0" algn="l">
               <a:spcBef>
                 <a:spcPts val="0"/>
               </a:spcBef>
@@ -15558,11 +16098,11 @@
               <a:buClr>
                 <a:schemeClr val="dk1"/>
               </a:buClr>
-              <a:buSzPts val="1800"/>
+              <a:buSzPts val="2800"/>
               <a:buChar char="●"/>
             </a:pPr>
             <a:r>
-              <a:rPr lang="es-CL" sz="1800">
+              <a:rPr lang="es-CL" sz="2800">
                 <a:solidFill>
                   <a:schemeClr val="dk1"/>
                 </a:solidFill>
@@ -15570,7 +16110,7 @@
               <a:t>Cambio de </a:t>
             </a:r>
             <a:r>
-              <a:rPr lang="es-CL" sz="1800">
+              <a:rPr lang="es-CL" sz="2800">
                 <a:solidFill>
                   <a:schemeClr val="dk1"/>
                 </a:solidFill>
@@ -15578,21 +16118,21 @@
               <a:t>metodología</a:t>
             </a:r>
             <a:r>
-              <a:rPr lang="es-CL" sz="1800">
+              <a:rPr lang="es-CL" sz="2800">
                 <a:solidFill>
                   <a:schemeClr val="dk1"/>
                 </a:solidFill>
               </a:rPr>
               <a:t> a KanBan.</a:t>
             </a:r>
-            <a:endParaRPr sz="1800">
+            <a:endParaRPr sz="2800">
               <a:solidFill>
                 <a:schemeClr val="dk1"/>
               </a:solidFill>
             </a:endParaRPr>
           </a:p>
           <a:p>
-            <a:pPr indent="-342900" lvl="0" marL="457200" rtl="0" algn="l">
+            <a:pPr indent="-406400" lvl="0" marL="457200" rtl="0" algn="l">
               <a:spcBef>
                 <a:spcPts val="0"/>
               </a:spcBef>
@@ -15602,18 +16142,90 @@
               <a:buClr>
                 <a:schemeClr val="dk1"/>
               </a:buClr>
-              <a:buSzPts val="1800"/>
+              <a:buSzPts val="2800"/>
               <a:buChar char="●"/>
             </a:pPr>
             <a:r>
-              <a:rPr lang="es-CL" sz="1800">
+              <a:rPr lang="es-CL" sz="2800">
                 <a:solidFill>
                   <a:schemeClr val="dk1"/>
                 </a:solidFill>
               </a:rPr>
               <a:t>Falta de tiempo.</a:t>
             </a:r>
-            <a:endParaRPr sz="1800">
+            <a:endParaRPr sz="2800">
+              <a:solidFill>
+                <a:schemeClr val="dk1"/>
+              </a:solidFill>
+            </a:endParaRPr>
+          </a:p>
+          <a:p>
+            <a:pPr indent="-406400" lvl="0" marL="457200" rtl="0" algn="l">
+              <a:spcBef>
+                <a:spcPts val="0"/>
+              </a:spcBef>
+              <a:spcAft>
+                <a:spcPts val="0"/>
+              </a:spcAft>
+              <a:buClr>
+                <a:schemeClr val="dk1"/>
+              </a:buClr>
+              <a:buSzPts val="2800"/>
+              <a:buChar char="●"/>
+            </a:pPr>
+            <a:r>
+              <a:rPr lang="es-CL" sz="2800">
+                <a:solidFill>
+                  <a:schemeClr val="dk1"/>
+                </a:solidFill>
+              </a:rPr>
+              <a:t>Complejidad de la base de datos.</a:t>
+            </a:r>
+            <a:endParaRPr sz="2800">
+              <a:solidFill>
+                <a:schemeClr val="dk1"/>
+              </a:solidFill>
+            </a:endParaRPr>
+          </a:p>
+          <a:p>
+            <a:pPr indent="-406400" lvl="0" marL="457200" rtl="0" algn="l">
+              <a:spcBef>
+                <a:spcPts val="0"/>
+              </a:spcBef>
+              <a:spcAft>
+                <a:spcPts val="0"/>
+              </a:spcAft>
+              <a:buClr>
+                <a:schemeClr val="dk1"/>
+              </a:buClr>
+              <a:buSzPts val="2800"/>
+              <a:buChar char="●"/>
+            </a:pPr>
+            <a:r>
+              <a:rPr lang="es-CL" sz="2800">
+                <a:solidFill>
+                  <a:schemeClr val="dk1"/>
+                </a:solidFill>
+              </a:rPr>
+              <a:t>Falta de conocimientos de </a:t>
+            </a:r>
+            <a:r>
+              <a:rPr lang="es-CL" sz="2800">
+                <a:solidFill>
+                  <a:schemeClr val="dk1"/>
+                </a:solidFill>
+              </a:rPr>
+              <a:t>tecnologías</a:t>
+            </a:r>
+            <a:r>
+              <a:rPr lang="es-CL" sz="2800">
+                <a:solidFill>
+                  <a:schemeClr val="dk1"/>
+                </a:solidFill>
+              </a:rPr>
+              <a:t> utilizadas. (Curva de aprendizaje)</a:t>
+            </a:r>
+            <a:endParaRPr sz="2800">
               <a:solidFill>
                 <a:schemeClr val="dk1"/>
               </a:solidFill>
@@ -15623,7 +16235,7 @@
       </p:sp>
       <p:sp>
         <p:nvSpPr>
-          <p:cNvPr id="234" name="Google Shape;234;p14"/>
+          <p:cNvPr id="243" name="Google Shape;243;p14"/>
           <p:cNvSpPr txBox="1"/>
           <p:nvPr/>
         </p:nvSpPr>
@@ -15682,12 +16294,12 @@
 </p:sld>
 </file>
 
-<file path=ppt/slides/slide17.xml><?xml version="1.0" encoding="utf-8"?>
+<file path=ppt/slides/slide18.xml><?xml version="1.0" encoding="utf-8"?>
 <p:sld xmlns:a="http://schemas.openxmlformats.org/drawingml/2006/main" xmlns:r="http://schemas.openxmlformats.org/officeDocument/2006/relationships" xmlns:mc="http://schemas.openxmlformats.org/markup-compatibility/2006" xmlns:mv="urn:schemas-microsoft-com:mac:vml" xmlns:p="http://schemas.openxmlformats.org/presentationml/2006/main" xmlns:c="http://schemas.openxmlformats.org/drawingml/2006/chart" xmlns:dgm="http://schemas.openxmlformats.org/drawingml/2006/diagram" xmlns:o="urn:schemas-microsoft-com:office:office" xmlns:v="urn:schemas-microsoft-com:vml" xmlns:pvml="urn:schemas-microsoft-com:office:powerpoint" xmlns:com="http://schemas.openxmlformats.org/drawingml/2006/compatibility" xmlns:p14="http://schemas.microsoft.com/office/powerpoint/2010/main" xmlns:p15="http://schemas.microsoft.com/office/powerpoint/2012/main" xmlns:ahyp="http://schemas.microsoft.com/office/drawing/2018/hyperlinkcolor">
   <p:cSld>
     <p:spTree>
       <p:nvGrpSpPr>
-        <p:cNvPr id="238" name="Shape 238"/>
+        <p:cNvPr id="247" name="Shape 247"/>
         <p:cNvGrpSpPr/>
         <p:nvPr/>
       </p:nvGrpSpPr>
@@ -15701,7 +16313,7 @@
       </p:grpSpPr>
       <p:pic>
         <p:nvPicPr>
-          <p:cNvPr descr="EscuelaIT Duoc UC - Escuela de Informática y Telecomunicaciones Duoc UC - Duoc  UC | LinkedIn" id="239" name="Google Shape;239;p16"/>
+          <p:cNvPr descr="EscuelaIT Duoc UC - Escuela de Informática y Telecomunicaciones Duoc UC - Duoc  UC | LinkedIn" id="248" name="Google Shape;248;p16"/>
           <p:cNvPicPr preferRelativeResize="0"/>
           <p:nvPr/>
         </p:nvPicPr>
@@ -15728,7 +16340,7 @@
       </p:pic>
       <p:sp>
         <p:nvSpPr>
-          <p:cNvPr id="240" name="Google Shape;240;p16"/>
+          <p:cNvPr id="249" name="Google Shape;249;p16"/>
           <p:cNvSpPr txBox="1"/>
           <p:nvPr/>
         </p:nvSpPr>
@@ -18842,7 +19454,31 @@
                 <a:cs typeface="Calibri"/>
                 <a:sym typeface="Calibri"/>
               </a:rPr>
-              <a:t>Vista </a:t>
+              <a:t>Vista de </a:t>
+            </a:r>
+            <a:r>
+              <a:rPr lang="es-CL" sz="1800">
+                <a:solidFill>
+                  <a:schemeClr val="dk1"/>
+                </a:solidFill>
+                <a:latin typeface="Calibri"/>
+                <a:ea typeface="Calibri"/>
+                <a:cs typeface="Calibri"/>
+                <a:sym typeface="Calibri"/>
+              </a:rPr>
+              <a:t>análisis</a:t>
+            </a:r>
+            <a:r>
+              <a:rPr lang="es-CL" sz="1800">
+                <a:solidFill>
+                  <a:schemeClr val="dk1"/>
+                </a:solidFill>
+                <a:latin typeface="Calibri"/>
+                <a:ea typeface="Calibri"/>
+                <a:cs typeface="Calibri"/>
+                <a:sym typeface="Calibri"/>
+              </a:rPr>
+              <a:t> por asiento, rendimiento y comportamiento</a:t>
             </a:r>
             <a:endParaRPr sz="1800">
               <a:solidFill>
